--- a/public/lessons/year-6-maths/autumn/week-10/retrieve-factors-and-order-of-operations/teaching-powerpoint-v1.pptx
+++ b/public/lessons/year-6-maths/autumn/week-10/retrieve-factors-and-order-of-operations/teaching-powerpoint-v1.pptx
@@ -2,24 +2,24 @@
 <file path=ppt/presentation.xml><?xml version="1.0" encoding="utf-8"?>
 <p:presentation xmlns:p="http://schemas.openxmlformats.org/presentationml/2006/main">
   <p:sldMasterIdLst>
-    <p:sldMasterId xmlns:r="http://schemas.openxmlformats.org/officeDocument/2006/relationships" id="2147483648" r:id="R12cf6e51936b48bf"/>
+    <p:sldMasterId xmlns:r="http://schemas.openxmlformats.org/officeDocument/2006/relationships" id="2147483648" r:id="R3ef9ddfbcee7464c"/>
   </p:sldMasterIdLst>
   <p:notesMasterIdLst>
-    <p:notesMasterId xmlns:r="http://schemas.openxmlformats.org/officeDocument/2006/relationships" r:id="R5e7d2d7ef9fd470d"/>
+    <p:notesMasterId xmlns:r="http://schemas.openxmlformats.org/officeDocument/2006/relationships" r:id="R56b2a9670a364c6a"/>
   </p:notesMasterIdLst>
   <p:sldIdLst>
-    <p:sldId xmlns:r="http://schemas.openxmlformats.org/officeDocument/2006/relationships" id="256" r:id="R9984c6e5fc844951"/>
-    <p:sldId xmlns:r="http://schemas.openxmlformats.org/officeDocument/2006/relationships" id="257" r:id="R0ff4309ae26d447a"/>
-    <p:sldId xmlns:r="http://schemas.openxmlformats.org/officeDocument/2006/relationships" id="258" r:id="Re7e9087fdd79411c"/>
-    <p:sldId xmlns:r="http://schemas.openxmlformats.org/officeDocument/2006/relationships" id="259" r:id="R455ff09e762f4ace"/>
-    <p:sldId xmlns:r="http://schemas.openxmlformats.org/officeDocument/2006/relationships" id="260" r:id="Rb955be6fc7604b86"/>
-    <p:sldId xmlns:r="http://schemas.openxmlformats.org/officeDocument/2006/relationships" id="261" r:id="R799aad5b086e4f7a"/>
-    <p:sldId xmlns:r="http://schemas.openxmlformats.org/officeDocument/2006/relationships" id="262" r:id="R74162045592847da"/>
-    <p:sldId xmlns:r="http://schemas.openxmlformats.org/officeDocument/2006/relationships" id="263" r:id="R0547e36580304a59"/>
-    <p:sldId xmlns:r="http://schemas.openxmlformats.org/officeDocument/2006/relationships" id="264" r:id="R454224be6ceb4035"/>
-    <p:sldId xmlns:r="http://schemas.openxmlformats.org/officeDocument/2006/relationships" id="265" r:id="R08ad5addc8c74bae"/>
-    <p:sldId xmlns:r="http://schemas.openxmlformats.org/officeDocument/2006/relationships" id="266" r:id="R3e8f8fcfa6194897"/>
-    <p:sldId xmlns:r="http://schemas.openxmlformats.org/officeDocument/2006/relationships" id="267" r:id="Rfc2feb94e2044986"/>
+    <p:sldId xmlns:r="http://schemas.openxmlformats.org/officeDocument/2006/relationships" id="256" r:id="R6d2830148a1e4b5f"/>
+    <p:sldId xmlns:r="http://schemas.openxmlformats.org/officeDocument/2006/relationships" id="257" r:id="Reeb188b363cf411a"/>
+    <p:sldId xmlns:r="http://schemas.openxmlformats.org/officeDocument/2006/relationships" id="258" r:id="R67d7f79f4f85493f"/>
+    <p:sldId xmlns:r="http://schemas.openxmlformats.org/officeDocument/2006/relationships" id="259" r:id="Rd3b3cad37a2348c9"/>
+    <p:sldId xmlns:r="http://schemas.openxmlformats.org/officeDocument/2006/relationships" id="260" r:id="Rfecb2560625d4dfa"/>
+    <p:sldId xmlns:r="http://schemas.openxmlformats.org/officeDocument/2006/relationships" id="261" r:id="R39020be07038462d"/>
+    <p:sldId xmlns:r="http://schemas.openxmlformats.org/officeDocument/2006/relationships" id="262" r:id="R4855959fc0ee4c5e"/>
+    <p:sldId xmlns:r="http://schemas.openxmlformats.org/officeDocument/2006/relationships" id="263" r:id="Rcb3b4571bf4f4c06"/>
+    <p:sldId xmlns:r="http://schemas.openxmlformats.org/officeDocument/2006/relationships" id="264" r:id="Redc9f684cf3f472d"/>
+    <p:sldId xmlns:r="http://schemas.openxmlformats.org/officeDocument/2006/relationships" id="265" r:id="R89656005552e489d"/>
+    <p:sldId xmlns:r="http://schemas.openxmlformats.org/officeDocument/2006/relationships" id="266" r:id="R10b75623cfca4b2e"/>
+    <p:sldId xmlns:r="http://schemas.openxmlformats.org/officeDocument/2006/relationships" id="267" r:id="Rc9a413f7e45c433a"/>
   </p:sldIdLst>
   <p:sldSz cx="12192000" cy="6858000"/>
   <p:notesSz cx="6858000" cy="9144000"/>
@@ -873,7 +873,7 @@
           <a:lstStyle xmlns:a="http://schemas.openxmlformats.org/drawingml/2006/main"/>
           <a:p xmlns:a="http://schemas.openxmlformats.org/drawingml/2006/main">
             <a:r>
-              <a:t>I do. Reveal the question, setup and each calculation stage one click at a time. Pupils watch before copying. Model answer: HCF 12; LCM 72.</a:t>
+              <a:t>I do. Reveal the question, then reveal each mathematical change one click at a time. Point to the numbers and operation that changed before moving to the next line. Final answer: HCF 12; LCM 72.</a:t>
             </a:r>
           </a:p>
         </p:txBody>
@@ -1291,7 +1291,7 @@
   </p:cSld>
   <p:clrMap bg1="lt1" tx1="dk1" bg2="lt2" tx2="dk2" accent1="accent1" accent2="accent2" accent3="accent3" accent4="accent4" accent5="accent5" accent6="accent6" hlink="hlink" folHlink="folHlink"/>
   <p:sldLayoutIdLst>
-    <p:sldLayoutId xmlns:r="http://schemas.openxmlformats.org/officeDocument/2006/relationships" id="2147483649" r:id="Rfeb4483ff66d4419"/>
+    <p:sldLayoutId xmlns:r="http://schemas.openxmlformats.org/officeDocument/2006/relationships" id="2147483649" r:id="R86ca43db59434365"/>
   </p:sldLayoutIdLst>
   <p:txStyles>
     <p:titleStyle>
@@ -1842,7 +1842,7 @@
           <p:cNvPr id="12" name="">
             <a:extLst xmlns:a="http://schemas.openxmlformats.org/drawingml/2006/main">
               <a:ext uri="{FF2B5EF4-FFF2-40B4-BE49-F238E27FC236}">
-                <a16:creationId xmlns:a16="http://schemas.microsoft.com/office/drawing/2014/main" id="{54901A2B-8361-4504-9184-AEE4900EBF19}"/>
+                <a16:creationId xmlns:a16="http://schemas.microsoft.com/office/drawing/2014/main" id="{2CB9AAF3-75B1-44CE-8815-075D61D2B11D}"/>
               </a:ext>
             </a:extLst>
           </p:cNvPr>
@@ -1874,7 +1874,7 @@
           <p:cNvPr id="2" name="">
             <a:extLst xmlns:a="http://schemas.openxmlformats.org/drawingml/2006/main">
               <a:ext uri="{FF2B5EF4-FFF2-40B4-BE49-F238E27FC236}">
-                <a16:creationId xmlns:a16="http://schemas.microsoft.com/office/drawing/2014/main" id="{A8FB2BE3-A933-46D6-8C86-F665FA2F0F6D}"/>
+                <a16:creationId xmlns:a16="http://schemas.microsoft.com/office/drawing/2014/main" id="{221E635C-58C8-4C2C-9D7C-634E6C5E5502}"/>
               </a:ext>
             </a:extLst>
           </p:cNvPr>
@@ -1931,7 +1931,7 @@
           <p:cNvPr id="3" name="">
             <a:extLst xmlns:a="http://schemas.openxmlformats.org/drawingml/2006/main">
               <a:ext uri="{FF2B5EF4-FFF2-40B4-BE49-F238E27FC236}">
-                <a16:creationId xmlns:a16="http://schemas.microsoft.com/office/drawing/2014/main" id="{5523D194-AFA2-4FF4-B14C-E0332FB1ED98}"/>
+                <a16:creationId xmlns:a16="http://schemas.microsoft.com/office/drawing/2014/main" id="{E2808D0B-EAA4-4313-B002-B8075B3D9424}"/>
               </a:ext>
             </a:extLst>
           </p:cNvPr>
@@ -1965,7 +1965,7 @@
           <p:cNvPr id="4" name="">
             <a:extLst xmlns:a="http://schemas.openxmlformats.org/drawingml/2006/main">
               <a:ext uri="{FF2B5EF4-FFF2-40B4-BE49-F238E27FC236}">
-                <a16:creationId xmlns:a16="http://schemas.microsoft.com/office/drawing/2014/main" id="{256A947D-38C3-4D40-B404-0C13EA2D39AA}"/>
+                <a16:creationId xmlns:a16="http://schemas.microsoft.com/office/drawing/2014/main" id="{868F3170-A962-45A3-BBF9-EA767EBA83E5}"/>
               </a:ext>
             </a:extLst>
           </p:cNvPr>
@@ -2022,7 +2022,7 @@
           <p:cNvPr id="5" name="">
             <a:extLst xmlns:a="http://schemas.openxmlformats.org/drawingml/2006/main">
               <a:ext uri="{FF2B5EF4-FFF2-40B4-BE49-F238E27FC236}">
-                <a16:creationId xmlns:a16="http://schemas.microsoft.com/office/drawing/2014/main" id="{65EC05AF-2B50-4335-BC8D-453FE44DEA65}"/>
+                <a16:creationId xmlns:a16="http://schemas.microsoft.com/office/drawing/2014/main" id="{FCC998FC-5352-4256-A0D6-58865AA3F35F}"/>
               </a:ext>
             </a:extLst>
           </p:cNvPr>
@@ -2079,7 +2079,7 @@
           <p:cNvPr id="6" name="">
             <a:extLst xmlns:a="http://schemas.openxmlformats.org/drawingml/2006/main">
               <a:ext uri="{FF2B5EF4-FFF2-40B4-BE49-F238E27FC236}">
-                <a16:creationId xmlns:a16="http://schemas.microsoft.com/office/drawing/2014/main" id="{89554513-C939-4E59-A74F-AECBF92C8309}"/>
+                <a16:creationId xmlns:a16="http://schemas.microsoft.com/office/drawing/2014/main" id="{C34D7E57-01C6-449E-B4CA-D23F43DF0956}"/>
               </a:ext>
             </a:extLst>
           </p:cNvPr>
@@ -2113,7 +2113,7 @@
           <p:cNvPr id="7" name="">
             <a:extLst xmlns:a="http://schemas.openxmlformats.org/drawingml/2006/main">
               <a:ext uri="{FF2B5EF4-FFF2-40B4-BE49-F238E27FC236}">
-                <a16:creationId xmlns:a16="http://schemas.microsoft.com/office/drawing/2014/main" id="{7DD129B5-0419-4282-9228-D5C6BB57F044}"/>
+                <a16:creationId xmlns:a16="http://schemas.microsoft.com/office/drawing/2014/main" id="{D4B118D5-0E5E-4D89-8636-180329713E2F}"/>
               </a:ext>
             </a:extLst>
           </p:cNvPr>
@@ -2170,7 +2170,7 @@
           <p:cNvPr id="8" name="">
             <a:extLst xmlns:a="http://schemas.openxmlformats.org/drawingml/2006/main">
               <a:ext uri="{FF2B5EF4-FFF2-40B4-BE49-F238E27FC236}">
-                <a16:creationId xmlns:a16="http://schemas.microsoft.com/office/drawing/2014/main" id="{A2F5CCEF-E1DF-404E-B114-167A3C82D82E}"/>
+                <a16:creationId xmlns:a16="http://schemas.microsoft.com/office/drawing/2014/main" id="{238FB095-F57D-432A-A85F-DBD8A1E8D01C}"/>
               </a:ext>
             </a:extLst>
           </p:cNvPr>
@@ -2227,7 +2227,7 @@
           <p:cNvPr id="9" name="">
             <a:extLst xmlns:a="http://schemas.openxmlformats.org/drawingml/2006/main">
               <a:ext uri="{FF2B5EF4-FFF2-40B4-BE49-F238E27FC236}">
-                <a16:creationId xmlns:a16="http://schemas.microsoft.com/office/drawing/2014/main" id="{B15AC206-5196-4072-B73E-0E853B6D795B}"/>
+                <a16:creationId xmlns:a16="http://schemas.microsoft.com/office/drawing/2014/main" id="{AF39BD9E-CBEA-44E2-ABDC-875BF4DAEE58}"/>
               </a:ext>
             </a:extLst>
           </p:cNvPr>
@@ -2284,7 +2284,7 @@
           <p:cNvPr id="10" name="">
             <a:extLst xmlns:a="http://schemas.openxmlformats.org/drawingml/2006/main">
               <a:ext uri="{FF2B5EF4-FFF2-40B4-BE49-F238E27FC236}">
-                <a16:creationId xmlns:a16="http://schemas.microsoft.com/office/drawing/2014/main" id="{A0DBD9DB-3A5D-45E3-B1AB-3273A2C52F40}"/>
+                <a16:creationId xmlns:a16="http://schemas.microsoft.com/office/drawing/2014/main" id="{B8D6B90F-6F23-49DC-BAD2-1EF5E4C2BD3A}"/>
               </a:ext>
             </a:extLst>
           </p:cNvPr>
@@ -2341,7 +2341,7 @@
           <p:cNvPr id="11" name="">
             <a:extLst xmlns:a="http://schemas.openxmlformats.org/drawingml/2006/main">
               <a:ext uri="{FF2B5EF4-FFF2-40B4-BE49-F238E27FC236}">
-                <a16:creationId xmlns:a16="http://schemas.microsoft.com/office/drawing/2014/main" id="{73D062A0-3312-4696-B7C6-EBBD125AD248}"/>
+                <a16:creationId xmlns:a16="http://schemas.microsoft.com/office/drawing/2014/main" id="{F7BE130A-2E78-4278-8CF5-BE6DD7DF21F9}"/>
               </a:ext>
             </a:extLst>
           </p:cNvPr>
@@ -2396,7 +2396,7 @@
     </p:spTree>
     <p:extLst>
       <p:ext uri="{BB962C8B-B14F-4D97-AF65-F5344CB8AC3E}">
-        <p14:creationId xmlns:p14="http://schemas.microsoft.com/office/powerpoint/2010/main" val="1886065362"/>
+        <p14:creationId xmlns:p14="http://schemas.microsoft.com/office/powerpoint/2010/main" val="1266916085"/>
       </p:ext>
     </p:extLst>
   </p:cSld>
@@ -2427,7 +2427,7 @@
           <p:cNvPr id="14" name="">
             <a:extLst xmlns:a="http://schemas.openxmlformats.org/drawingml/2006/main">
               <a:ext uri="{FF2B5EF4-FFF2-40B4-BE49-F238E27FC236}">
-                <a16:creationId xmlns:a16="http://schemas.microsoft.com/office/drawing/2014/main" id="{26043D67-2311-40EC-B55B-7F2F38FDA912}"/>
+                <a16:creationId xmlns:a16="http://schemas.microsoft.com/office/drawing/2014/main" id="{A5399CC3-7296-4D58-AC38-90F59B67C359}"/>
               </a:ext>
             </a:extLst>
           </p:cNvPr>
@@ -2459,7 +2459,7 @@
           <p:cNvPr id="2" name="">
             <a:extLst xmlns:a="http://schemas.openxmlformats.org/drawingml/2006/main">
               <a:ext uri="{FF2B5EF4-FFF2-40B4-BE49-F238E27FC236}">
-                <a16:creationId xmlns:a16="http://schemas.microsoft.com/office/drawing/2014/main" id="{3E390244-F0B2-4094-9AFB-C060E3804DED}"/>
+                <a16:creationId xmlns:a16="http://schemas.microsoft.com/office/drawing/2014/main" id="{07024715-D4BB-4C3D-BC28-3868449AE726}"/>
               </a:ext>
             </a:extLst>
           </p:cNvPr>
@@ -2516,7 +2516,7 @@
           <p:cNvPr id="3" name="">
             <a:extLst xmlns:a="http://schemas.openxmlformats.org/drawingml/2006/main">
               <a:ext uri="{FF2B5EF4-FFF2-40B4-BE49-F238E27FC236}">
-                <a16:creationId xmlns:a16="http://schemas.microsoft.com/office/drawing/2014/main" id="{0F3B670B-66F2-472E-8741-5F134DF82EEB}"/>
+                <a16:creationId xmlns:a16="http://schemas.microsoft.com/office/drawing/2014/main" id="{3E55AFEA-452E-46A8-B2A7-140C9AAB646A}"/>
               </a:ext>
             </a:extLst>
           </p:cNvPr>
@@ -2548,7 +2548,7 @@
           <p:cNvPr id="4" name="">
             <a:extLst xmlns:a="http://schemas.openxmlformats.org/drawingml/2006/main">
               <a:ext uri="{FF2B5EF4-FFF2-40B4-BE49-F238E27FC236}">
-                <a16:creationId xmlns:a16="http://schemas.microsoft.com/office/drawing/2014/main" id="{FD562320-6E94-4A6A-B4B3-D090F9614BBA}"/>
+                <a16:creationId xmlns:a16="http://schemas.microsoft.com/office/drawing/2014/main" id="{0814814A-E04D-4D3E-9B62-FE2D55739C6D}"/>
               </a:ext>
             </a:extLst>
           </p:cNvPr>
@@ -2605,7 +2605,7 @@
           <p:cNvPr id="5" name="">
             <a:extLst xmlns:a="http://schemas.openxmlformats.org/drawingml/2006/main">
               <a:ext uri="{FF2B5EF4-FFF2-40B4-BE49-F238E27FC236}">
-                <a16:creationId xmlns:a16="http://schemas.microsoft.com/office/drawing/2014/main" id="{1F554487-F1E7-42CF-9DE0-EC79B52C58F1}"/>
+                <a16:creationId xmlns:a16="http://schemas.microsoft.com/office/drawing/2014/main" id="{4B227B44-BE01-4765-A92F-9AE5734ABBCB}"/>
               </a:ext>
             </a:extLst>
           </p:cNvPr>
@@ -2662,7 +2662,7 @@
           <p:cNvPr id="6" name="">
             <a:extLst xmlns:a="http://schemas.openxmlformats.org/drawingml/2006/main">
               <a:ext uri="{FF2B5EF4-FFF2-40B4-BE49-F238E27FC236}">
-                <a16:creationId xmlns:a16="http://schemas.microsoft.com/office/drawing/2014/main" id="{D1EBA0EE-4C29-40E0-81A7-73B1963DA7F1}"/>
+                <a16:creationId xmlns:a16="http://schemas.microsoft.com/office/drawing/2014/main" id="{BE5C7B2B-32F7-4726-B6F1-3BE06C7492CD}"/>
               </a:ext>
             </a:extLst>
           </p:cNvPr>
@@ -2719,7 +2719,7 @@
           <p:cNvPr id="7" name="">
             <a:extLst xmlns:a="http://schemas.openxmlformats.org/drawingml/2006/main">
               <a:ext uri="{FF2B5EF4-FFF2-40B4-BE49-F238E27FC236}">
-                <a16:creationId xmlns:a16="http://schemas.microsoft.com/office/drawing/2014/main" id="{674C7DBC-9307-4AEC-A627-F531C783B810}"/>
+                <a16:creationId xmlns:a16="http://schemas.microsoft.com/office/drawing/2014/main" id="{BBFCE8A7-6B73-4604-9478-36AD37A9460D}"/>
               </a:ext>
             </a:extLst>
           </p:cNvPr>
@@ -2751,7 +2751,7 @@
           <p:cNvPr id="8" name="">
             <a:extLst xmlns:a="http://schemas.openxmlformats.org/drawingml/2006/main">
               <a:ext uri="{FF2B5EF4-FFF2-40B4-BE49-F238E27FC236}">
-                <a16:creationId xmlns:a16="http://schemas.microsoft.com/office/drawing/2014/main" id="{EC5DE87C-DC57-42B4-A4FB-1842F1ADAD78}"/>
+                <a16:creationId xmlns:a16="http://schemas.microsoft.com/office/drawing/2014/main" id="{E828442C-BA80-4D66-B76A-3881A2864CA7}"/>
               </a:ext>
             </a:extLst>
           </p:cNvPr>
@@ -2808,7 +2808,7 @@
           <p:cNvPr id="9" name="">
             <a:extLst xmlns:a="http://schemas.openxmlformats.org/drawingml/2006/main">
               <a:ext uri="{FF2B5EF4-FFF2-40B4-BE49-F238E27FC236}">
-                <a16:creationId xmlns:a16="http://schemas.microsoft.com/office/drawing/2014/main" id="{69DF84F0-E365-445F-B2E0-78FEABE7C381}"/>
+                <a16:creationId xmlns:a16="http://schemas.microsoft.com/office/drawing/2014/main" id="{3A8D9AFC-BCE9-4928-95B4-A18BCD6D5EE8}"/>
               </a:ext>
             </a:extLst>
           </p:cNvPr>
@@ -2865,7 +2865,7 @@
           <p:cNvPr id="10" name="">
             <a:extLst xmlns:a="http://schemas.openxmlformats.org/drawingml/2006/main">
               <a:ext uri="{FF2B5EF4-FFF2-40B4-BE49-F238E27FC236}">
-                <a16:creationId xmlns:a16="http://schemas.microsoft.com/office/drawing/2014/main" id="{E87C0B49-FC09-4185-AAED-530C0BF5B8BE}"/>
+                <a16:creationId xmlns:a16="http://schemas.microsoft.com/office/drawing/2014/main" id="{2E4D314F-25A3-421E-A179-9BA0AE38F530}"/>
               </a:ext>
             </a:extLst>
           </p:cNvPr>
@@ -2922,7 +2922,7 @@
           <p:cNvPr id="11" name="">
             <a:extLst xmlns:a="http://schemas.openxmlformats.org/drawingml/2006/main">
               <a:ext uri="{FF2B5EF4-FFF2-40B4-BE49-F238E27FC236}">
-                <a16:creationId xmlns:a16="http://schemas.microsoft.com/office/drawing/2014/main" id="{FD75A873-F813-4450-BF55-AF990439A126}"/>
+                <a16:creationId xmlns:a16="http://schemas.microsoft.com/office/drawing/2014/main" id="{1E77A853-6DBB-4BA5-9ED1-FF73D7CFD56B}"/>
               </a:ext>
             </a:extLst>
           </p:cNvPr>
@@ -2979,7 +2979,7 @@
           <p:cNvPr id="12" name="">
             <a:extLst xmlns:a="http://schemas.openxmlformats.org/drawingml/2006/main">
               <a:ext uri="{FF2B5EF4-FFF2-40B4-BE49-F238E27FC236}">
-                <a16:creationId xmlns:a16="http://schemas.microsoft.com/office/drawing/2014/main" id="{672AD590-9B3E-4FEB-B237-9AF11ACA8404}"/>
+                <a16:creationId xmlns:a16="http://schemas.microsoft.com/office/drawing/2014/main" id="{24967AB6-8C3D-4942-84D7-E42CB2BF0505}"/>
               </a:ext>
             </a:extLst>
           </p:cNvPr>
@@ -3036,7 +3036,7 @@
           <p:cNvPr id="13" name="">
             <a:extLst xmlns:a="http://schemas.openxmlformats.org/drawingml/2006/main">
               <a:ext uri="{FF2B5EF4-FFF2-40B4-BE49-F238E27FC236}">
-                <a16:creationId xmlns:a16="http://schemas.microsoft.com/office/drawing/2014/main" id="{A9F89919-8E0B-439A-AD3E-6397E8567ED1}"/>
+                <a16:creationId xmlns:a16="http://schemas.microsoft.com/office/drawing/2014/main" id="{09BF5F87-5EB5-406B-BEF5-E9D917D44E5B}"/>
               </a:ext>
             </a:extLst>
           </p:cNvPr>
@@ -3091,7 +3091,7 @@
     </p:spTree>
     <p:extLst>
       <p:ext uri="{BB962C8B-B14F-4D97-AF65-F5344CB8AC3E}">
-        <p14:creationId xmlns:p14="http://schemas.microsoft.com/office/powerpoint/2010/main" val="1702130705"/>
+        <p14:creationId xmlns:p14="http://schemas.microsoft.com/office/powerpoint/2010/main" val="2100833380"/>
       </p:ext>
     </p:extLst>
   </p:cSld>
@@ -3292,7 +3292,7 @@
           <p:cNvPr id="19" name="">
             <a:extLst xmlns:a="http://schemas.openxmlformats.org/drawingml/2006/main">
               <a:ext uri="{FF2B5EF4-FFF2-40B4-BE49-F238E27FC236}">
-                <a16:creationId xmlns:a16="http://schemas.microsoft.com/office/drawing/2014/main" id="{530C4A74-39E9-47A3-84D9-FE91C15E006B}"/>
+                <a16:creationId xmlns:a16="http://schemas.microsoft.com/office/drawing/2014/main" id="{FA8CAE9B-76A5-467C-94FA-C4B08A608EE8}"/>
               </a:ext>
             </a:extLst>
           </p:cNvPr>
@@ -3324,7 +3324,7 @@
           <p:cNvPr id="2" name="">
             <a:extLst xmlns:a="http://schemas.openxmlformats.org/drawingml/2006/main">
               <a:ext uri="{FF2B5EF4-FFF2-40B4-BE49-F238E27FC236}">
-                <a16:creationId xmlns:a16="http://schemas.microsoft.com/office/drawing/2014/main" id="{9DFD5246-46B7-4799-8ED9-9169CAB023E6}"/>
+                <a16:creationId xmlns:a16="http://schemas.microsoft.com/office/drawing/2014/main" id="{5C0F5496-4633-4FD1-86A7-BAFD20DD74D5}"/>
               </a:ext>
             </a:extLst>
           </p:cNvPr>
@@ -3381,7 +3381,7 @@
           <p:cNvPr id="3" name="">
             <a:extLst xmlns:a="http://schemas.openxmlformats.org/drawingml/2006/main">
               <a:ext uri="{FF2B5EF4-FFF2-40B4-BE49-F238E27FC236}">
-                <a16:creationId xmlns:a16="http://schemas.microsoft.com/office/drawing/2014/main" id="{52EFA91C-601A-4A2E-8C1E-6315094A7B10}"/>
+                <a16:creationId xmlns:a16="http://schemas.microsoft.com/office/drawing/2014/main" id="{151FAB01-0F51-4280-A2C6-B03AB1E869B9}"/>
               </a:ext>
             </a:extLst>
           </p:cNvPr>
@@ -3413,7 +3413,7 @@
           <p:cNvPr id="4" name="">
             <a:extLst xmlns:a="http://schemas.openxmlformats.org/drawingml/2006/main">
               <a:ext uri="{FF2B5EF4-FFF2-40B4-BE49-F238E27FC236}">
-                <a16:creationId xmlns:a16="http://schemas.microsoft.com/office/drawing/2014/main" id="{E0B2B798-CAA3-49C3-B7BC-F1C1FB2FF3A3}"/>
+                <a16:creationId xmlns:a16="http://schemas.microsoft.com/office/drawing/2014/main" id="{D6F3A71E-1720-4519-9AD2-107E203A0674}"/>
               </a:ext>
             </a:extLst>
           </p:cNvPr>
@@ -3470,7 +3470,7 @@
           <p:cNvPr id="5" name="">
             <a:extLst xmlns:a="http://schemas.openxmlformats.org/drawingml/2006/main">
               <a:ext uri="{FF2B5EF4-FFF2-40B4-BE49-F238E27FC236}">
-                <a16:creationId xmlns:a16="http://schemas.microsoft.com/office/drawing/2014/main" id="{D04AE031-6E97-41AA-A8F6-DD8365AF1FAE}"/>
+                <a16:creationId xmlns:a16="http://schemas.microsoft.com/office/drawing/2014/main" id="{CA26DF05-7867-423F-9A66-E971304A42BF}"/>
               </a:ext>
             </a:extLst>
           </p:cNvPr>
@@ -3527,7 +3527,7 @@
           <p:cNvPr id="6" name="">
             <a:extLst xmlns:a="http://schemas.openxmlformats.org/drawingml/2006/main">
               <a:ext uri="{FF2B5EF4-FFF2-40B4-BE49-F238E27FC236}">
-                <a16:creationId xmlns:a16="http://schemas.microsoft.com/office/drawing/2014/main" id="{B7119CF0-86EA-4FFC-9074-D270E14920B1}"/>
+                <a16:creationId xmlns:a16="http://schemas.microsoft.com/office/drawing/2014/main" id="{3FF93DC7-44AF-4F52-8829-AD8201C35A2B}"/>
               </a:ext>
             </a:extLst>
           </p:cNvPr>
@@ -3584,7 +3584,7 @@
           <p:cNvPr id="7" name="">
             <a:extLst xmlns:a="http://schemas.openxmlformats.org/drawingml/2006/main">
               <a:ext uri="{FF2B5EF4-FFF2-40B4-BE49-F238E27FC236}">
-                <a16:creationId xmlns:a16="http://schemas.microsoft.com/office/drawing/2014/main" id="{62CCCC5F-0E78-4D78-B960-92AF26C660E8}"/>
+                <a16:creationId xmlns:a16="http://schemas.microsoft.com/office/drawing/2014/main" id="{FAE7D179-F182-44C8-8907-C1473EC3584A}"/>
               </a:ext>
             </a:extLst>
           </p:cNvPr>
@@ -3616,7 +3616,7 @@
           <p:cNvPr id="8" name="">
             <a:extLst xmlns:a="http://schemas.openxmlformats.org/drawingml/2006/main">
               <a:ext uri="{FF2B5EF4-FFF2-40B4-BE49-F238E27FC236}">
-                <a16:creationId xmlns:a16="http://schemas.microsoft.com/office/drawing/2014/main" id="{57F66887-3519-4CE3-AFAB-01632D00B761}"/>
+                <a16:creationId xmlns:a16="http://schemas.microsoft.com/office/drawing/2014/main" id="{72245F86-0F45-48D8-8D5C-E36EEDCF89BA}"/>
               </a:ext>
             </a:extLst>
           </p:cNvPr>
@@ -3673,7 +3673,7 @@
           <p:cNvPr id="9" name="">
             <a:extLst xmlns:a="http://schemas.openxmlformats.org/drawingml/2006/main">
               <a:ext uri="{FF2B5EF4-FFF2-40B4-BE49-F238E27FC236}">
-                <a16:creationId xmlns:a16="http://schemas.microsoft.com/office/drawing/2014/main" id="{BD70C15F-BADB-4585-A574-203A3D2CB0F7}"/>
+                <a16:creationId xmlns:a16="http://schemas.microsoft.com/office/drawing/2014/main" id="{1F0DC237-EC83-44E8-8D68-42B6912FF218}"/>
               </a:ext>
             </a:extLst>
           </p:cNvPr>
@@ -3730,7 +3730,7 @@
           <p:cNvPr id="10" name="">
             <a:extLst xmlns:a="http://schemas.openxmlformats.org/drawingml/2006/main">
               <a:ext uri="{FF2B5EF4-FFF2-40B4-BE49-F238E27FC236}">
-                <a16:creationId xmlns:a16="http://schemas.microsoft.com/office/drawing/2014/main" id="{62292AAE-8924-4919-ADDB-14F728AAE807}"/>
+                <a16:creationId xmlns:a16="http://schemas.microsoft.com/office/drawing/2014/main" id="{331490E8-0151-4142-A20A-7FA90821D057}"/>
               </a:ext>
             </a:extLst>
           </p:cNvPr>
@@ -3787,7 +3787,7 @@
           <p:cNvPr id="11" name="">
             <a:extLst xmlns:a="http://schemas.openxmlformats.org/drawingml/2006/main">
               <a:ext uri="{FF2B5EF4-FFF2-40B4-BE49-F238E27FC236}">
-                <a16:creationId xmlns:a16="http://schemas.microsoft.com/office/drawing/2014/main" id="{F251103A-FC58-46E6-9CE1-AEF13BAB01DD}"/>
+                <a16:creationId xmlns:a16="http://schemas.microsoft.com/office/drawing/2014/main" id="{A1B682CD-DA88-4F13-A5C8-673D383C48FD}"/>
               </a:ext>
             </a:extLst>
           </p:cNvPr>
@@ -3821,7 +3821,7 @@
           <p:cNvPr id="12" name="">
             <a:extLst xmlns:a="http://schemas.openxmlformats.org/drawingml/2006/main">
               <a:ext uri="{FF2B5EF4-FFF2-40B4-BE49-F238E27FC236}">
-                <a16:creationId xmlns:a16="http://schemas.microsoft.com/office/drawing/2014/main" id="{BD8197DD-7D4C-427A-892B-D80EE5B7C5F7}"/>
+                <a16:creationId xmlns:a16="http://schemas.microsoft.com/office/drawing/2014/main" id="{8E2FC1E7-8A68-4E1B-912C-A4F8FA05EDD8}"/>
               </a:ext>
             </a:extLst>
           </p:cNvPr>
@@ -3878,7 +3878,7 @@
           <p:cNvPr id="13" name="">
             <a:extLst xmlns:a="http://schemas.openxmlformats.org/drawingml/2006/main">
               <a:ext uri="{FF2B5EF4-FFF2-40B4-BE49-F238E27FC236}">
-                <a16:creationId xmlns:a16="http://schemas.microsoft.com/office/drawing/2014/main" id="{641F53F1-D695-4C34-BC27-E51C8CA88ED0}"/>
+                <a16:creationId xmlns:a16="http://schemas.microsoft.com/office/drawing/2014/main" id="{738C7CBC-ACC1-4149-89A5-E7DA96A8E4D2}"/>
               </a:ext>
             </a:extLst>
           </p:cNvPr>
@@ -3935,7 +3935,7 @@
           <p:cNvPr id="14" name="">
             <a:extLst xmlns:a="http://schemas.openxmlformats.org/drawingml/2006/main">
               <a:ext uri="{FF2B5EF4-FFF2-40B4-BE49-F238E27FC236}">
-                <a16:creationId xmlns:a16="http://schemas.microsoft.com/office/drawing/2014/main" id="{5E1CFF57-724F-45BE-AF19-8DEB8E928359}"/>
+                <a16:creationId xmlns:a16="http://schemas.microsoft.com/office/drawing/2014/main" id="{BA336E4A-6EE3-4143-B2B8-F877CEEE786F}"/>
               </a:ext>
             </a:extLst>
           </p:cNvPr>
@@ -3992,7 +3992,7 @@
           <p:cNvPr id="15" name="">
             <a:extLst xmlns:a="http://schemas.openxmlformats.org/drawingml/2006/main">
               <a:ext uri="{FF2B5EF4-FFF2-40B4-BE49-F238E27FC236}">
-                <a16:creationId xmlns:a16="http://schemas.microsoft.com/office/drawing/2014/main" id="{85AA9D0E-2D87-4760-9807-35085C8BCF29}"/>
+                <a16:creationId xmlns:a16="http://schemas.microsoft.com/office/drawing/2014/main" id="{E4E866D5-B491-4D46-9C96-FDBF02E099A6}"/>
               </a:ext>
             </a:extLst>
           </p:cNvPr>
@@ -4026,7 +4026,7 @@
           <p:cNvPr id="16" name="">
             <a:extLst xmlns:a="http://schemas.openxmlformats.org/drawingml/2006/main">
               <a:ext uri="{FF2B5EF4-FFF2-40B4-BE49-F238E27FC236}">
-                <a16:creationId xmlns:a16="http://schemas.microsoft.com/office/drawing/2014/main" id="{C29CDC9E-933C-4F8C-8DB0-580AA50862B6}"/>
+                <a16:creationId xmlns:a16="http://schemas.microsoft.com/office/drawing/2014/main" id="{9E9CFD04-18E1-4357-A7D4-5C391F099ED7}"/>
               </a:ext>
             </a:extLst>
           </p:cNvPr>
@@ -4083,7 +4083,7 @@
           <p:cNvPr id="17" name="">
             <a:extLst xmlns:a="http://schemas.openxmlformats.org/drawingml/2006/main">
               <a:ext uri="{FF2B5EF4-FFF2-40B4-BE49-F238E27FC236}">
-                <a16:creationId xmlns:a16="http://schemas.microsoft.com/office/drawing/2014/main" id="{81AF40A2-994F-4303-ABAB-59105FC0BF02}"/>
+                <a16:creationId xmlns:a16="http://schemas.microsoft.com/office/drawing/2014/main" id="{12B680D6-723F-44FA-AA53-D87D6F503D21}"/>
               </a:ext>
             </a:extLst>
           </p:cNvPr>
@@ -4140,7 +4140,7 @@
           <p:cNvPr id="18" name="">
             <a:extLst xmlns:a="http://schemas.openxmlformats.org/drawingml/2006/main">
               <a:ext uri="{FF2B5EF4-FFF2-40B4-BE49-F238E27FC236}">
-                <a16:creationId xmlns:a16="http://schemas.microsoft.com/office/drawing/2014/main" id="{B141BF73-1330-4DED-BF47-62CC04EAAB4B}"/>
+                <a16:creationId xmlns:a16="http://schemas.microsoft.com/office/drawing/2014/main" id="{2B6C1F67-EF2D-4DFC-A2B4-4F8B15A34A8B}"/>
               </a:ext>
             </a:extLst>
           </p:cNvPr>
@@ -4195,7 +4195,7 @@
     </p:spTree>
     <p:extLst>
       <p:ext uri="{BB962C8B-B14F-4D97-AF65-F5344CB8AC3E}">
-        <p14:creationId xmlns:p14="http://schemas.microsoft.com/office/powerpoint/2010/main" val="1493059789"/>
+        <p14:creationId xmlns:p14="http://schemas.microsoft.com/office/powerpoint/2010/main" val="1949970771"/>
       </p:ext>
     </p:extLst>
   </p:cSld>
@@ -4350,7 +4350,7 @@
           <p:cNvPr id="23" name="">
             <a:extLst xmlns:a="http://schemas.openxmlformats.org/drawingml/2006/main">
               <a:ext uri="{FF2B5EF4-FFF2-40B4-BE49-F238E27FC236}">
-                <a16:creationId xmlns:a16="http://schemas.microsoft.com/office/drawing/2014/main" id="{9DA617B1-15C7-4791-A4C6-9F530B735287}"/>
+                <a16:creationId xmlns:a16="http://schemas.microsoft.com/office/drawing/2014/main" id="{FAD43897-56DA-429F-8643-2F2FDDA7764F}"/>
               </a:ext>
             </a:extLst>
           </p:cNvPr>
@@ -4382,7 +4382,7 @@
           <p:cNvPr id="2" name="">
             <a:extLst xmlns:a="http://schemas.openxmlformats.org/drawingml/2006/main">
               <a:ext uri="{FF2B5EF4-FFF2-40B4-BE49-F238E27FC236}">
-                <a16:creationId xmlns:a16="http://schemas.microsoft.com/office/drawing/2014/main" id="{C0D6A6FE-F4B0-4028-B7AE-0B7C400DB948}"/>
+                <a16:creationId xmlns:a16="http://schemas.microsoft.com/office/drawing/2014/main" id="{96B83B5F-8317-48C0-A580-0697EEA5259F}"/>
               </a:ext>
             </a:extLst>
           </p:cNvPr>
@@ -4439,7 +4439,7 @@
           <p:cNvPr id="3" name="">
             <a:extLst xmlns:a="http://schemas.openxmlformats.org/drawingml/2006/main">
               <a:ext uri="{FF2B5EF4-FFF2-40B4-BE49-F238E27FC236}">
-                <a16:creationId xmlns:a16="http://schemas.microsoft.com/office/drawing/2014/main" id="{3D86F83A-9050-4149-BA91-6E8D1A9B0927}"/>
+                <a16:creationId xmlns:a16="http://schemas.microsoft.com/office/drawing/2014/main" id="{8BFC9618-2C0A-4B01-BEB4-583DF2857B9D}"/>
               </a:ext>
             </a:extLst>
           </p:cNvPr>
@@ -4471,7 +4471,7 @@
           <p:cNvPr id="4" name="">
             <a:extLst xmlns:a="http://schemas.openxmlformats.org/drawingml/2006/main">
               <a:ext uri="{FF2B5EF4-FFF2-40B4-BE49-F238E27FC236}">
-                <a16:creationId xmlns:a16="http://schemas.microsoft.com/office/drawing/2014/main" id="{6AE17272-6BB8-4C3A-BBB9-BAA82B117124}"/>
+                <a16:creationId xmlns:a16="http://schemas.microsoft.com/office/drawing/2014/main" id="{6D4967E8-ADEF-4C0C-9172-91CBCF9ADCBA}"/>
               </a:ext>
             </a:extLst>
           </p:cNvPr>
@@ -4528,7 +4528,7 @@
           <p:cNvPr id="5" name="">
             <a:extLst xmlns:a="http://schemas.openxmlformats.org/drawingml/2006/main">
               <a:ext uri="{FF2B5EF4-FFF2-40B4-BE49-F238E27FC236}">
-                <a16:creationId xmlns:a16="http://schemas.microsoft.com/office/drawing/2014/main" id="{9FA5018E-E08A-49D1-9859-B15CAEFEB61E}"/>
+                <a16:creationId xmlns:a16="http://schemas.microsoft.com/office/drawing/2014/main" id="{D72285FC-23AD-4337-958A-BE74F1FAFA16}"/>
               </a:ext>
             </a:extLst>
           </p:cNvPr>
@@ -4585,7 +4585,7 @@
           <p:cNvPr id="6" name="">
             <a:extLst xmlns:a="http://schemas.openxmlformats.org/drawingml/2006/main">
               <a:ext uri="{FF2B5EF4-FFF2-40B4-BE49-F238E27FC236}">
-                <a16:creationId xmlns:a16="http://schemas.microsoft.com/office/drawing/2014/main" id="{6F61B171-A6F5-47D5-95F5-A2782A1C9460}"/>
+                <a16:creationId xmlns:a16="http://schemas.microsoft.com/office/drawing/2014/main" id="{B5DD18D2-07E8-4638-8410-D452BD9B54EC}"/>
               </a:ext>
             </a:extLst>
           </p:cNvPr>
@@ -4642,7 +4642,7 @@
           <p:cNvPr id="7" name="">
             <a:extLst xmlns:a="http://schemas.openxmlformats.org/drawingml/2006/main">
               <a:ext uri="{FF2B5EF4-FFF2-40B4-BE49-F238E27FC236}">
-                <a16:creationId xmlns:a16="http://schemas.microsoft.com/office/drawing/2014/main" id="{7817DC00-75BE-4275-AAC6-D7A48162563D}"/>
+                <a16:creationId xmlns:a16="http://schemas.microsoft.com/office/drawing/2014/main" id="{3ED0D3E5-E357-45F2-BF78-84797D26CF2B}"/>
               </a:ext>
             </a:extLst>
           </p:cNvPr>
@@ -4674,7 +4674,7 @@
           <p:cNvPr id="8" name="">
             <a:extLst xmlns:a="http://schemas.openxmlformats.org/drawingml/2006/main">
               <a:ext uri="{FF2B5EF4-FFF2-40B4-BE49-F238E27FC236}">
-                <a16:creationId xmlns:a16="http://schemas.microsoft.com/office/drawing/2014/main" id="{41F33827-C3B5-4E1A-B581-A4AA9E658BAA}"/>
+                <a16:creationId xmlns:a16="http://schemas.microsoft.com/office/drawing/2014/main" id="{8A5DB44D-9A12-40A9-85AC-B55BEDC23D27}"/>
               </a:ext>
             </a:extLst>
           </p:cNvPr>
@@ -4731,7 +4731,7 @@
           <p:cNvPr id="9" name="">
             <a:extLst xmlns:a="http://schemas.openxmlformats.org/drawingml/2006/main">
               <a:ext uri="{FF2B5EF4-FFF2-40B4-BE49-F238E27FC236}">
-                <a16:creationId xmlns:a16="http://schemas.microsoft.com/office/drawing/2014/main" id="{E5C39A1D-FFFE-4853-8D5D-B448C07A3DCE}"/>
+                <a16:creationId xmlns:a16="http://schemas.microsoft.com/office/drawing/2014/main" id="{4F243972-5715-4EB7-AE9A-DC82C67B2851}"/>
               </a:ext>
             </a:extLst>
           </p:cNvPr>
@@ -4788,7 +4788,7 @@
           <p:cNvPr id="10" name="">
             <a:extLst xmlns:a="http://schemas.openxmlformats.org/drawingml/2006/main">
               <a:ext uri="{FF2B5EF4-FFF2-40B4-BE49-F238E27FC236}">
-                <a16:creationId xmlns:a16="http://schemas.microsoft.com/office/drawing/2014/main" id="{8C5ED9C3-7582-4A27-9220-0A59EC6E8649}"/>
+                <a16:creationId xmlns:a16="http://schemas.microsoft.com/office/drawing/2014/main" id="{FA3A4B4C-934C-47F0-8881-F53599D55792}"/>
               </a:ext>
             </a:extLst>
           </p:cNvPr>
@@ -4822,7 +4822,7 @@
           <p:cNvPr id="11" name="">
             <a:extLst xmlns:a="http://schemas.openxmlformats.org/drawingml/2006/main">
               <a:ext uri="{FF2B5EF4-FFF2-40B4-BE49-F238E27FC236}">
-                <a16:creationId xmlns:a16="http://schemas.microsoft.com/office/drawing/2014/main" id="{D4489A67-7270-4B72-A77E-6CD8AFF9880E}"/>
+                <a16:creationId xmlns:a16="http://schemas.microsoft.com/office/drawing/2014/main" id="{8A360D40-1D50-4202-B617-BB2FBFC36AC3}"/>
               </a:ext>
             </a:extLst>
           </p:cNvPr>
@@ -4854,7 +4854,7 @@
           <p:cNvPr id="12" name="">
             <a:extLst xmlns:a="http://schemas.openxmlformats.org/drawingml/2006/main">
               <a:ext uri="{FF2B5EF4-FFF2-40B4-BE49-F238E27FC236}">
-                <a16:creationId xmlns:a16="http://schemas.microsoft.com/office/drawing/2014/main" id="{69134673-99D8-4258-8CE9-FC045089370B}"/>
+                <a16:creationId xmlns:a16="http://schemas.microsoft.com/office/drawing/2014/main" id="{C4296F37-580C-4F6A-9B06-499F87560396}"/>
               </a:ext>
             </a:extLst>
           </p:cNvPr>
@@ -4911,7 +4911,7 @@
           <p:cNvPr id="13" name="">
             <a:extLst xmlns:a="http://schemas.openxmlformats.org/drawingml/2006/main">
               <a:ext uri="{FF2B5EF4-FFF2-40B4-BE49-F238E27FC236}">
-                <a16:creationId xmlns:a16="http://schemas.microsoft.com/office/drawing/2014/main" id="{E262BB22-369D-4F0D-9502-23681DDFB5E0}"/>
+                <a16:creationId xmlns:a16="http://schemas.microsoft.com/office/drawing/2014/main" id="{69E0D938-0125-4EED-AA04-6FC1509B59F1}"/>
               </a:ext>
             </a:extLst>
           </p:cNvPr>
@@ -4968,7 +4968,7 @@
           <p:cNvPr id="14" name="">
             <a:extLst xmlns:a="http://schemas.openxmlformats.org/drawingml/2006/main">
               <a:ext uri="{FF2B5EF4-FFF2-40B4-BE49-F238E27FC236}">
-                <a16:creationId xmlns:a16="http://schemas.microsoft.com/office/drawing/2014/main" id="{9F95B26D-0FC4-4F39-99F2-9524E4F15493}"/>
+                <a16:creationId xmlns:a16="http://schemas.microsoft.com/office/drawing/2014/main" id="{460D63C5-4F08-4140-9435-F6B5241F628B}"/>
               </a:ext>
             </a:extLst>
           </p:cNvPr>
@@ -5002,7 +5002,7 @@
           <p:cNvPr id="15" name="">
             <a:extLst xmlns:a="http://schemas.openxmlformats.org/drawingml/2006/main">
               <a:ext uri="{FF2B5EF4-FFF2-40B4-BE49-F238E27FC236}">
-                <a16:creationId xmlns:a16="http://schemas.microsoft.com/office/drawing/2014/main" id="{25B59ED7-784D-4507-AA54-C124A923E45C}"/>
+                <a16:creationId xmlns:a16="http://schemas.microsoft.com/office/drawing/2014/main" id="{A5972143-6020-4CF7-A5CE-0E5E95E4EE5D}"/>
               </a:ext>
             </a:extLst>
           </p:cNvPr>
@@ -5034,7 +5034,7 @@
           <p:cNvPr id="16" name="">
             <a:extLst xmlns:a="http://schemas.openxmlformats.org/drawingml/2006/main">
               <a:ext uri="{FF2B5EF4-FFF2-40B4-BE49-F238E27FC236}">
-                <a16:creationId xmlns:a16="http://schemas.microsoft.com/office/drawing/2014/main" id="{61B8EAF2-585B-4CD6-B0AE-3F0FC119AD9A}"/>
+                <a16:creationId xmlns:a16="http://schemas.microsoft.com/office/drawing/2014/main" id="{C9EBB2B6-881F-4FD3-B309-B54AEFF6EC85}"/>
               </a:ext>
             </a:extLst>
           </p:cNvPr>
@@ -5091,7 +5091,7 @@
           <p:cNvPr id="17" name="">
             <a:extLst xmlns:a="http://schemas.openxmlformats.org/drawingml/2006/main">
               <a:ext uri="{FF2B5EF4-FFF2-40B4-BE49-F238E27FC236}">
-                <a16:creationId xmlns:a16="http://schemas.microsoft.com/office/drawing/2014/main" id="{0E8DCBD0-181C-4750-884D-307FD7D22873}"/>
+                <a16:creationId xmlns:a16="http://schemas.microsoft.com/office/drawing/2014/main" id="{66408DBD-E292-4094-B4AD-A0179498E9D5}"/>
               </a:ext>
             </a:extLst>
           </p:cNvPr>
@@ -5148,7 +5148,7 @@
           <p:cNvPr id="18" name="">
             <a:extLst xmlns:a="http://schemas.openxmlformats.org/drawingml/2006/main">
               <a:ext uri="{FF2B5EF4-FFF2-40B4-BE49-F238E27FC236}">
-                <a16:creationId xmlns:a16="http://schemas.microsoft.com/office/drawing/2014/main" id="{E7BB7DF9-292B-48EA-9B0B-71A6587D018D}"/>
+                <a16:creationId xmlns:a16="http://schemas.microsoft.com/office/drawing/2014/main" id="{09A9C915-C542-4E55-BDD5-18F4B6D587BB}"/>
               </a:ext>
             </a:extLst>
           </p:cNvPr>
@@ -5182,7 +5182,7 @@
           <p:cNvPr id="19" name="">
             <a:extLst xmlns:a="http://schemas.openxmlformats.org/drawingml/2006/main">
               <a:ext uri="{FF2B5EF4-FFF2-40B4-BE49-F238E27FC236}">
-                <a16:creationId xmlns:a16="http://schemas.microsoft.com/office/drawing/2014/main" id="{3BF74DC3-B419-4461-A7E7-046872003AA9}"/>
+                <a16:creationId xmlns:a16="http://schemas.microsoft.com/office/drawing/2014/main" id="{6CE4858D-C8C0-46A6-B777-2B4FB92EE589}"/>
               </a:ext>
             </a:extLst>
           </p:cNvPr>
@@ -5214,7 +5214,7 @@
           <p:cNvPr id="20" name="">
             <a:extLst xmlns:a="http://schemas.openxmlformats.org/drawingml/2006/main">
               <a:ext uri="{FF2B5EF4-FFF2-40B4-BE49-F238E27FC236}">
-                <a16:creationId xmlns:a16="http://schemas.microsoft.com/office/drawing/2014/main" id="{ED452BEF-523D-4A85-8AEB-C531633A6493}"/>
+                <a16:creationId xmlns:a16="http://schemas.microsoft.com/office/drawing/2014/main" id="{546CEF42-9387-4029-B5A9-6744D66FFA4F}"/>
               </a:ext>
             </a:extLst>
           </p:cNvPr>
@@ -5271,7 +5271,7 @@
           <p:cNvPr id="21" name="">
             <a:extLst xmlns:a="http://schemas.openxmlformats.org/drawingml/2006/main">
               <a:ext uri="{FF2B5EF4-FFF2-40B4-BE49-F238E27FC236}">
-                <a16:creationId xmlns:a16="http://schemas.microsoft.com/office/drawing/2014/main" id="{9C974400-3CD0-4CEB-9FEA-A75429C2EB08}"/>
+                <a16:creationId xmlns:a16="http://schemas.microsoft.com/office/drawing/2014/main" id="{8D3E2AA2-59A8-4109-ACB8-4954AFDCE95B}"/>
               </a:ext>
             </a:extLst>
           </p:cNvPr>
@@ -5328,7 +5328,7 @@
           <p:cNvPr id="22" name="">
             <a:extLst xmlns:a="http://schemas.openxmlformats.org/drawingml/2006/main">
               <a:ext uri="{FF2B5EF4-FFF2-40B4-BE49-F238E27FC236}">
-                <a16:creationId xmlns:a16="http://schemas.microsoft.com/office/drawing/2014/main" id="{2F31F31E-E8CE-4268-8A52-D38C9B91460E}"/>
+                <a16:creationId xmlns:a16="http://schemas.microsoft.com/office/drawing/2014/main" id="{8D9DD8ED-E491-4155-BF6A-39CDCBB68DFC}"/>
               </a:ext>
             </a:extLst>
           </p:cNvPr>
@@ -5383,7 +5383,7 @@
     </p:spTree>
     <p:extLst>
       <p:ext uri="{BB962C8B-B14F-4D97-AF65-F5344CB8AC3E}">
-        <p14:creationId xmlns:p14="http://schemas.microsoft.com/office/powerpoint/2010/main" val="295329111"/>
+        <p14:creationId xmlns:p14="http://schemas.microsoft.com/office/powerpoint/2010/main" val="1664986835"/>
       </p:ext>
     </p:extLst>
   </p:cSld>
@@ -5584,7 +5584,7 @@
           <p:cNvPr id="23" name="">
             <a:extLst xmlns:a="http://schemas.openxmlformats.org/drawingml/2006/main">
               <a:ext uri="{FF2B5EF4-FFF2-40B4-BE49-F238E27FC236}">
-                <a16:creationId xmlns:a16="http://schemas.microsoft.com/office/drawing/2014/main" id="{7EF62DB5-1B58-46A9-BCB6-5B567BF7028A}"/>
+                <a16:creationId xmlns:a16="http://schemas.microsoft.com/office/drawing/2014/main" id="{0E88999F-12F4-46CA-AFF6-5DF822EDE1EA}"/>
               </a:ext>
             </a:extLst>
           </p:cNvPr>
@@ -5616,7 +5616,7 @@
           <p:cNvPr id="2" name="">
             <a:extLst xmlns:a="http://schemas.openxmlformats.org/drawingml/2006/main">
               <a:ext uri="{FF2B5EF4-FFF2-40B4-BE49-F238E27FC236}">
-                <a16:creationId xmlns:a16="http://schemas.microsoft.com/office/drawing/2014/main" id="{5EB2D51E-DC16-4DD3-A08A-AA99E6BBB872}"/>
+                <a16:creationId xmlns:a16="http://schemas.microsoft.com/office/drawing/2014/main" id="{8D7198AB-9F31-426D-BCA5-25448F448250}"/>
               </a:ext>
             </a:extLst>
           </p:cNvPr>
@@ -5673,7 +5673,7 @@
           <p:cNvPr id="3" name="">
             <a:extLst xmlns:a="http://schemas.openxmlformats.org/drawingml/2006/main">
               <a:ext uri="{FF2B5EF4-FFF2-40B4-BE49-F238E27FC236}">
-                <a16:creationId xmlns:a16="http://schemas.microsoft.com/office/drawing/2014/main" id="{280D2AF3-B8CE-46C9-9319-73A567CF1D4F}"/>
+                <a16:creationId xmlns:a16="http://schemas.microsoft.com/office/drawing/2014/main" id="{6AD0E910-5C45-42DB-98BC-FBB15E06C584}"/>
               </a:ext>
             </a:extLst>
           </p:cNvPr>
@@ -5705,7 +5705,7 @@
           <p:cNvPr id="4" name="">
             <a:extLst xmlns:a="http://schemas.openxmlformats.org/drawingml/2006/main">
               <a:ext uri="{FF2B5EF4-FFF2-40B4-BE49-F238E27FC236}">
-                <a16:creationId xmlns:a16="http://schemas.microsoft.com/office/drawing/2014/main" id="{89C5B7CE-AAD3-4A81-B98D-9D74FEE969AE}"/>
+                <a16:creationId xmlns:a16="http://schemas.microsoft.com/office/drawing/2014/main" id="{F20013C3-148D-4DB4-AD40-F21FED1F8478}"/>
               </a:ext>
             </a:extLst>
           </p:cNvPr>
@@ -5762,7 +5762,7 @@
           <p:cNvPr id="5" name="">
             <a:extLst xmlns:a="http://schemas.openxmlformats.org/drawingml/2006/main">
               <a:ext uri="{FF2B5EF4-FFF2-40B4-BE49-F238E27FC236}">
-                <a16:creationId xmlns:a16="http://schemas.microsoft.com/office/drawing/2014/main" id="{71B1312F-6387-45D4-A0AD-2DBB99F367C2}"/>
+                <a16:creationId xmlns:a16="http://schemas.microsoft.com/office/drawing/2014/main" id="{833E4AED-1418-4B1F-956D-D8E4647D780D}"/>
               </a:ext>
             </a:extLst>
           </p:cNvPr>
@@ -5819,7 +5819,7 @@
           <p:cNvPr id="6" name="">
             <a:extLst xmlns:a="http://schemas.openxmlformats.org/drawingml/2006/main">
               <a:ext uri="{FF2B5EF4-FFF2-40B4-BE49-F238E27FC236}">
-                <a16:creationId xmlns:a16="http://schemas.microsoft.com/office/drawing/2014/main" id="{F9557AC8-ED5D-45FC-BEF4-CE755CB48047}"/>
+                <a16:creationId xmlns:a16="http://schemas.microsoft.com/office/drawing/2014/main" id="{817ACD60-1E66-44AB-8557-3611999832D5}"/>
               </a:ext>
             </a:extLst>
           </p:cNvPr>
@@ -5876,7 +5876,7 @@
           <p:cNvPr id="7" name="">
             <a:extLst xmlns:a="http://schemas.openxmlformats.org/drawingml/2006/main">
               <a:ext uri="{FF2B5EF4-FFF2-40B4-BE49-F238E27FC236}">
-                <a16:creationId xmlns:a16="http://schemas.microsoft.com/office/drawing/2014/main" id="{CFC65AAB-6503-4315-9486-CDC8BDC09CB7}"/>
+                <a16:creationId xmlns:a16="http://schemas.microsoft.com/office/drawing/2014/main" id="{47FC70D7-0E1C-4251-BF6E-CD43665E19BF}"/>
               </a:ext>
             </a:extLst>
           </p:cNvPr>
@@ -5908,7 +5908,7 @@
           <p:cNvPr id="8" name="">
             <a:extLst xmlns:a="http://schemas.openxmlformats.org/drawingml/2006/main">
               <a:ext uri="{FF2B5EF4-FFF2-40B4-BE49-F238E27FC236}">
-                <a16:creationId xmlns:a16="http://schemas.microsoft.com/office/drawing/2014/main" id="{E93222B4-D9F6-4DD5-AD2A-E4E802071677}"/>
+                <a16:creationId xmlns:a16="http://schemas.microsoft.com/office/drawing/2014/main" id="{4C23C243-5C0B-433F-8BD2-E3AEC4504D0F}"/>
               </a:ext>
             </a:extLst>
           </p:cNvPr>
@@ -5965,7 +5965,7 @@
           <p:cNvPr id="9" name="">
             <a:extLst xmlns:a="http://schemas.openxmlformats.org/drawingml/2006/main">
               <a:ext uri="{FF2B5EF4-FFF2-40B4-BE49-F238E27FC236}">
-                <a16:creationId xmlns:a16="http://schemas.microsoft.com/office/drawing/2014/main" id="{71E6F665-2932-4358-8635-1159E2DCA162}"/>
+                <a16:creationId xmlns:a16="http://schemas.microsoft.com/office/drawing/2014/main" id="{21B11061-565C-4B73-A333-7149C8815B79}"/>
               </a:ext>
             </a:extLst>
           </p:cNvPr>
@@ -6022,7 +6022,7 @@
           <p:cNvPr id="10" name="">
             <a:extLst xmlns:a="http://schemas.openxmlformats.org/drawingml/2006/main">
               <a:ext uri="{FF2B5EF4-FFF2-40B4-BE49-F238E27FC236}">
-                <a16:creationId xmlns:a16="http://schemas.microsoft.com/office/drawing/2014/main" id="{9F05AE3A-00BC-4C44-94C5-6210F9D2ABB7}"/>
+                <a16:creationId xmlns:a16="http://schemas.microsoft.com/office/drawing/2014/main" id="{1168F156-38F7-4690-A180-C61B6C077328}"/>
               </a:ext>
             </a:extLst>
           </p:cNvPr>
@@ -6056,7 +6056,7 @@
           <p:cNvPr id="11" name="">
             <a:extLst xmlns:a="http://schemas.openxmlformats.org/drawingml/2006/main">
               <a:ext uri="{FF2B5EF4-FFF2-40B4-BE49-F238E27FC236}">
-                <a16:creationId xmlns:a16="http://schemas.microsoft.com/office/drawing/2014/main" id="{3F690D46-B0C8-4A7B-8335-439C5D50BF6A}"/>
+                <a16:creationId xmlns:a16="http://schemas.microsoft.com/office/drawing/2014/main" id="{A2ABC2E5-7018-4C28-9575-BD7D23065909}"/>
               </a:ext>
             </a:extLst>
           </p:cNvPr>
@@ -6088,7 +6088,7 @@
           <p:cNvPr id="12" name="">
             <a:extLst xmlns:a="http://schemas.openxmlformats.org/drawingml/2006/main">
               <a:ext uri="{FF2B5EF4-FFF2-40B4-BE49-F238E27FC236}">
-                <a16:creationId xmlns:a16="http://schemas.microsoft.com/office/drawing/2014/main" id="{5D6873BF-647E-41E9-A7D4-A79EAABAA6B8}"/>
+                <a16:creationId xmlns:a16="http://schemas.microsoft.com/office/drawing/2014/main" id="{92B8F416-C0EA-4498-BDAF-518164CADB32}"/>
               </a:ext>
             </a:extLst>
           </p:cNvPr>
@@ -6145,7 +6145,7 @@
           <p:cNvPr id="13" name="">
             <a:extLst xmlns:a="http://schemas.openxmlformats.org/drawingml/2006/main">
               <a:ext uri="{FF2B5EF4-FFF2-40B4-BE49-F238E27FC236}">
-                <a16:creationId xmlns:a16="http://schemas.microsoft.com/office/drawing/2014/main" id="{D950E34A-E85F-4FBE-8253-BD823A918AFD}"/>
+                <a16:creationId xmlns:a16="http://schemas.microsoft.com/office/drawing/2014/main" id="{43817F69-D00E-4F7A-BDD6-C527DA09669A}"/>
               </a:ext>
             </a:extLst>
           </p:cNvPr>
@@ -6202,7 +6202,7 @@
           <p:cNvPr id="14" name="">
             <a:extLst xmlns:a="http://schemas.openxmlformats.org/drawingml/2006/main">
               <a:ext uri="{FF2B5EF4-FFF2-40B4-BE49-F238E27FC236}">
-                <a16:creationId xmlns:a16="http://schemas.microsoft.com/office/drawing/2014/main" id="{69026C7A-6597-402D-81A6-F2FD8BC50D52}"/>
+                <a16:creationId xmlns:a16="http://schemas.microsoft.com/office/drawing/2014/main" id="{CD5459FE-8F4B-4117-987F-49CBB521B1CE}"/>
               </a:ext>
             </a:extLst>
           </p:cNvPr>
@@ -6236,7 +6236,7 @@
           <p:cNvPr id="15" name="">
             <a:extLst xmlns:a="http://schemas.openxmlformats.org/drawingml/2006/main">
               <a:ext uri="{FF2B5EF4-FFF2-40B4-BE49-F238E27FC236}">
-                <a16:creationId xmlns:a16="http://schemas.microsoft.com/office/drawing/2014/main" id="{83FCBD02-320F-4DDB-920A-D2F6D31F990C}"/>
+                <a16:creationId xmlns:a16="http://schemas.microsoft.com/office/drawing/2014/main" id="{EAB3F61A-3F01-4163-B3DC-A2B6CA57C8C0}"/>
               </a:ext>
             </a:extLst>
           </p:cNvPr>
@@ -6268,7 +6268,7 @@
           <p:cNvPr id="16" name="">
             <a:extLst xmlns:a="http://schemas.openxmlformats.org/drawingml/2006/main">
               <a:ext uri="{FF2B5EF4-FFF2-40B4-BE49-F238E27FC236}">
-                <a16:creationId xmlns:a16="http://schemas.microsoft.com/office/drawing/2014/main" id="{282AD7E9-19F2-4A68-A7F4-EE1A6E19F00A}"/>
+                <a16:creationId xmlns:a16="http://schemas.microsoft.com/office/drawing/2014/main" id="{9611523A-3681-45EC-B289-1F000107C0FB}"/>
               </a:ext>
             </a:extLst>
           </p:cNvPr>
@@ -6325,7 +6325,7 @@
           <p:cNvPr id="17" name="">
             <a:extLst xmlns:a="http://schemas.openxmlformats.org/drawingml/2006/main">
               <a:ext uri="{FF2B5EF4-FFF2-40B4-BE49-F238E27FC236}">
-                <a16:creationId xmlns:a16="http://schemas.microsoft.com/office/drawing/2014/main" id="{14CF86E3-B4D0-4BEA-B348-9B116C3FA0AB}"/>
+                <a16:creationId xmlns:a16="http://schemas.microsoft.com/office/drawing/2014/main" id="{7A05614A-B491-434B-94C8-61794ACE598D}"/>
               </a:ext>
             </a:extLst>
           </p:cNvPr>
@@ -6382,7 +6382,7 @@
           <p:cNvPr id="18" name="">
             <a:extLst xmlns:a="http://schemas.openxmlformats.org/drawingml/2006/main">
               <a:ext uri="{FF2B5EF4-FFF2-40B4-BE49-F238E27FC236}">
-                <a16:creationId xmlns:a16="http://schemas.microsoft.com/office/drawing/2014/main" id="{A08A5162-1F4F-42D1-B591-1E47CD1BEF35}"/>
+                <a16:creationId xmlns:a16="http://schemas.microsoft.com/office/drawing/2014/main" id="{E7D6D50F-F1B0-4621-8421-4CC6133C1763}"/>
               </a:ext>
             </a:extLst>
           </p:cNvPr>
@@ -6416,7 +6416,7 @@
           <p:cNvPr id="19" name="">
             <a:extLst xmlns:a="http://schemas.openxmlformats.org/drawingml/2006/main">
               <a:ext uri="{FF2B5EF4-FFF2-40B4-BE49-F238E27FC236}">
-                <a16:creationId xmlns:a16="http://schemas.microsoft.com/office/drawing/2014/main" id="{49C40128-6EAD-40A2-99B3-C28052E22F53}"/>
+                <a16:creationId xmlns:a16="http://schemas.microsoft.com/office/drawing/2014/main" id="{9D6029AE-20E7-4E53-A5D6-551D5EE25A68}"/>
               </a:ext>
             </a:extLst>
           </p:cNvPr>
@@ -6448,7 +6448,7 @@
           <p:cNvPr id="20" name="">
             <a:extLst xmlns:a="http://schemas.openxmlformats.org/drawingml/2006/main">
               <a:ext uri="{FF2B5EF4-FFF2-40B4-BE49-F238E27FC236}">
-                <a16:creationId xmlns:a16="http://schemas.microsoft.com/office/drawing/2014/main" id="{A2067F0B-BD3A-46D6-8D69-8FFC1EC0BA5C}"/>
+                <a16:creationId xmlns:a16="http://schemas.microsoft.com/office/drawing/2014/main" id="{089E1182-8EBE-4B8D-A81E-0B89E00FB98C}"/>
               </a:ext>
             </a:extLst>
           </p:cNvPr>
@@ -6505,7 +6505,7 @@
           <p:cNvPr id="21" name="">
             <a:extLst xmlns:a="http://schemas.openxmlformats.org/drawingml/2006/main">
               <a:ext uri="{FF2B5EF4-FFF2-40B4-BE49-F238E27FC236}">
-                <a16:creationId xmlns:a16="http://schemas.microsoft.com/office/drawing/2014/main" id="{F7648581-1068-4F53-9394-507ECCE526FC}"/>
+                <a16:creationId xmlns:a16="http://schemas.microsoft.com/office/drawing/2014/main" id="{7BAC0659-0F6E-401A-919E-45A815CC2EBC}"/>
               </a:ext>
             </a:extLst>
           </p:cNvPr>
@@ -6562,7 +6562,7 @@
           <p:cNvPr id="22" name="">
             <a:extLst xmlns:a="http://schemas.openxmlformats.org/drawingml/2006/main">
               <a:ext uri="{FF2B5EF4-FFF2-40B4-BE49-F238E27FC236}">
-                <a16:creationId xmlns:a16="http://schemas.microsoft.com/office/drawing/2014/main" id="{071004AC-1F87-48D5-8B2A-A0A01523A784}"/>
+                <a16:creationId xmlns:a16="http://schemas.microsoft.com/office/drawing/2014/main" id="{0E84A1BA-1F8D-4FAF-849B-5FA6A2E034AA}"/>
               </a:ext>
             </a:extLst>
           </p:cNvPr>
@@ -6617,7 +6617,7 @@
     </p:spTree>
     <p:extLst>
       <p:ext uri="{BB962C8B-B14F-4D97-AF65-F5344CB8AC3E}">
-        <p14:creationId xmlns:p14="http://schemas.microsoft.com/office/powerpoint/2010/main" val="548207493"/>
+        <p14:creationId xmlns:p14="http://schemas.microsoft.com/office/powerpoint/2010/main" val="1630148697"/>
       </p:ext>
     </p:extLst>
   </p:cSld>
@@ -6818,7 +6818,7 @@
           <p:cNvPr id="16" name="">
             <a:extLst xmlns:a="http://schemas.openxmlformats.org/drawingml/2006/main">
               <a:ext uri="{FF2B5EF4-FFF2-40B4-BE49-F238E27FC236}">
-                <a16:creationId xmlns:a16="http://schemas.microsoft.com/office/drawing/2014/main" id="{55916A17-67A0-43F8-B4BF-5104B9A636F0}"/>
+                <a16:creationId xmlns:a16="http://schemas.microsoft.com/office/drawing/2014/main" id="{9C1F9D38-5AC5-4217-AA4F-4DE0846BF3A9}"/>
               </a:ext>
             </a:extLst>
           </p:cNvPr>
@@ -6850,7 +6850,7 @@
           <p:cNvPr id="2" name="">
             <a:extLst xmlns:a="http://schemas.openxmlformats.org/drawingml/2006/main">
               <a:ext uri="{FF2B5EF4-FFF2-40B4-BE49-F238E27FC236}">
-                <a16:creationId xmlns:a16="http://schemas.microsoft.com/office/drawing/2014/main" id="{75AE68F3-DDDD-4D5B-BB53-BF85E974F0A5}"/>
+                <a16:creationId xmlns:a16="http://schemas.microsoft.com/office/drawing/2014/main" id="{B8562282-17F9-4D03-A777-9299B514F36F}"/>
               </a:ext>
             </a:extLst>
           </p:cNvPr>
@@ -6907,7 +6907,7 @@
           <p:cNvPr id="3" name="">
             <a:extLst xmlns:a="http://schemas.openxmlformats.org/drawingml/2006/main">
               <a:ext uri="{FF2B5EF4-FFF2-40B4-BE49-F238E27FC236}">
-                <a16:creationId xmlns:a16="http://schemas.microsoft.com/office/drawing/2014/main" id="{77DDB94D-3C7D-41BE-AD35-A326D91A7B54}"/>
+                <a16:creationId xmlns:a16="http://schemas.microsoft.com/office/drawing/2014/main" id="{5F02E3E8-8068-43DE-93CE-87A49126DD08}"/>
               </a:ext>
             </a:extLst>
           </p:cNvPr>
@@ -6939,7 +6939,7 @@
           <p:cNvPr id="4" name="">
             <a:extLst xmlns:a="http://schemas.openxmlformats.org/drawingml/2006/main">
               <a:ext uri="{FF2B5EF4-FFF2-40B4-BE49-F238E27FC236}">
-                <a16:creationId xmlns:a16="http://schemas.microsoft.com/office/drawing/2014/main" id="{A18A8370-3EC8-48A9-820D-55A484D11867}"/>
+                <a16:creationId xmlns:a16="http://schemas.microsoft.com/office/drawing/2014/main" id="{3AFD88DF-2C63-478F-9D68-CAC712A31564}"/>
               </a:ext>
             </a:extLst>
           </p:cNvPr>
@@ -6996,7 +6996,7 @@
           <p:cNvPr id="5" name="">
             <a:extLst xmlns:a="http://schemas.openxmlformats.org/drawingml/2006/main">
               <a:ext uri="{FF2B5EF4-FFF2-40B4-BE49-F238E27FC236}">
-                <a16:creationId xmlns:a16="http://schemas.microsoft.com/office/drawing/2014/main" id="{4DE7F6E0-B801-4C69-823F-358EFF077527}"/>
+                <a16:creationId xmlns:a16="http://schemas.microsoft.com/office/drawing/2014/main" id="{FA6E33BE-BA03-4F20-AA98-A654E3E61C05}"/>
               </a:ext>
             </a:extLst>
           </p:cNvPr>
@@ -7053,7 +7053,7 @@
           <p:cNvPr id="6" name="">
             <a:extLst xmlns:a="http://schemas.openxmlformats.org/drawingml/2006/main">
               <a:ext uri="{FF2B5EF4-FFF2-40B4-BE49-F238E27FC236}">
-                <a16:creationId xmlns:a16="http://schemas.microsoft.com/office/drawing/2014/main" id="{099B8276-C769-4CD9-8FD1-60A537EFE120}"/>
+                <a16:creationId xmlns:a16="http://schemas.microsoft.com/office/drawing/2014/main" id="{AFA78640-F243-4D15-921A-63730C42C5B3}"/>
               </a:ext>
             </a:extLst>
           </p:cNvPr>
@@ -7110,7 +7110,7 @@
           <p:cNvPr id="7" name="">
             <a:extLst xmlns:a="http://schemas.openxmlformats.org/drawingml/2006/main">
               <a:ext uri="{FF2B5EF4-FFF2-40B4-BE49-F238E27FC236}">
-                <a16:creationId xmlns:a16="http://schemas.microsoft.com/office/drawing/2014/main" id="{D9CA271F-C7E9-4011-A005-0B2DF6701FFC}"/>
+                <a16:creationId xmlns:a16="http://schemas.microsoft.com/office/drawing/2014/main" id="{125D6DF3-FF55-4E84-A609-4D622EB28ECE}"/>
               </a:ext>
             </a:extLst>
           </p:cNvPr>
@@ -7142,7 +7142,7 @@
           <p:cNvPr id="8" name="">
             <a:extLst xmlns:a="http://schemas.openxmlformats.org/drawingml/2006/main">
               <a:ext uri="{FF2B5EF4-FFF2-40B4-BE49-F238E27FC236}">
-                <a16:creationId xmlns:a16="http://schemas.microsoft.com/office/drawing/2014/main" id="{FE199413-02CB-432A-930C-F6CAB5FECF36}"/>
+                <a16:creationId xmlns:a16="http://schemas.microsoft.com/office/drawing/2014/main" id="{731182AF-B63A-49A5-9592-26C538CB5BA8}"/>
               </a:ext>
             </a:extLst>
           </p:cNvPr>
@@ -7199,7 +7199,7 @@
           <p:cNvPr id="9" name="">
             <a:extLst xmlns:a="http://schemas.openxmlformats.org/drawingml/2006/main">
               <a:ext uri="{FF2B5EF4-FFF2-40B4-BE49-F238E27FC236}">
-                <a16:creationId xmlns:a16="http://schemas.microsoft.com/office/drawing/2014/main" id="{FE395D4B-FD46-43E2-8CBA-7B83C41D6165}"/>
+                <a16:creationId xmlns:a16="http://schemas.microsoft.com/office/drawing/2014/main" id="{28713AD0-3C5A-4A89-BAE8-1652EAF62336}"/>
               </a:ext>
             </a:extLst>
           </p:cNvPr>
@@ -7256,7 +7256,7 @@
           <p:cNvPr id="10" name="">
             <a:extLst xmlns:a="http://schemas.openxmlformats.org/drawingml/2006/main">
               <a:ext uri="{FF2B5EF4-FFF2-40B4-BE49-F238E27FC236}">
-                <a16:creationId xmlns:a16="http://schemas.microsoft.com/office/drawing/2014/main" id="{B35F3DCB-2F6B-4FFD-BF6F-0D9438ACBF73}"/>
+                <a16:creationId xmlns:a16="http://schemas.microsoft.com/office/drawing/2014/main" id="{33B4E4C8-AFDD-49D4-9824-CBB3B825F876}"/>
               </a:ext>
             </a:extLst>
           </p:cNvPr>
@@ -7313,7 +7313,7 @@
           <p:cNvPr id="11" name="">
             <a:extLst xmlns:a="http://schemas.openxmlformats.org/drawingml/2006/main">
               <a:ext uri="{FF2B5EF4-FFF2-40B4-BE49-F238E27FC236}">
-                <a16:creationId xmlns:a16="http://schemas.microsoft.com/office/drawing/2014/main" id="{89CA4D43-C121-43E1-91CA-F698119F82B3}"/>
+                <a16:creationId xmlns:a16="http://schemas.microsoft.com/office/drawing/2014/main" id="{DF3B351C-024F-49BF-B06C-3B71BA48F1B2}"/>
               </a:ext>
             </a:extLst>
           </p:cNvPr>
@@ -7345,7 +7345,7 @@
           <p:cNvPr id="12" name="">
             <a:extLst xmlns:a="http://schemas.openxmlformats.org/drawingml/2006/main">
               <a:ext uri="{FF2B5EF4-FFF2-40B4-BE49-F238E27FC236}">
-                <a16:creationId xmlns:a16="http://schemas.microsoft.com/office/drawing/2014/main" id="{29D0A43B-507E-495E-B380-43273C39F870}"/>
+                <a16:creationId xmlns:a16="http://schemas.microsoft.com/office/drawing/2014/main" id="{E6F097BF-BFA7-45FD-9496-9B20234965E2}"/>
               </a:ext>
             </a:extLst>
           </p:cNvPr>
@@ -7402,7 +7402,7 @@
           <p:cNvPr id="13" name="">
             <a:extLst xmlns:a="http://schemas.openxmlformats.org/drawingml/2006/main">
               <a:ext uri="{FF2B5EF4-FFF2-40B4-BE49-F238E27FC236}">
-                <a16:creationId xmlns:a16="http://schemas.microsoft.com/office/drawing/2014/main" id="{3F7473C4-7E60-43F1-BA7C-0805EA82189D}"/>
+                <a16:creationId xmlns:a16="http://schemas.microsoft.com/office/drawing/2014/main" id="{1A9247C7-3137-4D13-A9CB-C8F6F0714B86}"/>
               </a:ext>
             </a:extLst>
           </p:cNvPr>
@@ -7459,7 +7459,7 @@
           <p:cNvPr id="14" name="">
             <a:extLst xmlns:a="http://schemas.openxmlformats.org/drawingml/2006/main">
               <a:ext uri="{FF2B5EF4-FFF2-40B4-BE49-F238E27FC236}">
-                <a16:creationId xmlns:a16="http://schemas.microsoft.com/office/drawing/2014/main" id="{8BB8E12F-63B5-45DA-98EA-2E5E54359D08}"/>
+                <a16:creationId xmlns:a16="http://schemas.microsoft.com/office/drawing/2014/main" id="{12220EAC-30C2-41DD-8A96-B5633BCED209}"/>
               </a:ext>
             </a:extLst>
           </p:cNvPr>
@@ -7516,7 +7516,7 @@
           <p:cNvPr id="15" name="">
             <a:extLst xmlns:a="http://schemas.openxmlformats.org/drawingml/2006/main">
               <a:ext uri="{FF2B5EF4-FFF2-40B4-BE49-F238E27FC236}">
-                <a16:creationId xmlns:a16="http://schemas.microsoft.com/office/drawing/2014/main" id="{8982ED5B-1F84-4270-A8AF-83265FCE8673}"/>
+                <a16:creationId xmlns:a16="http://schemas.microsoft.com/office/drawing/2014/main" id="{26D9EA82-0BB6-428E-9115-10916665241A}"/>
               </a:ext>
             </a:extLst>
           </p:cNvPr>
@@ -7571,7 +7571,7 @@
     </p:spTree>
     <p:extLst>
       <p:ext uri="{BB962C8B-B14F-4D97-AF65-F5344CB8AC3E}">
-        <p14:creationId xmlns:p14="http://schemas.microsoft.com/office/powerpoint/2010/main" val="1943895365"/>
+        <p14:creationId xmlns:p14="http://schemas.microsoft.com/office/powerpoint/2010/main" val="2121279912"/>
       </p:ext>
     </p:extLst>
   </p:cSld>
@@ -7772,7 +7772,7 @@
           <p:cNvPr id="23" name="">
             <a:extLst xmlns:a="http://schemas.openxmlformats.org/drawingml/2006/main">
               <a:ext uri="{FF2B5EF4-FFF2-40B4-BE49-F238E27FC236}">
-                <a16:creationId xmlns:a16="http://schemas.microsoft.com/office/drawing/2014/main" id="{C14D0DBF-600B-45A6-9D71-71B9F4D49BE1}"/>
+                <a16:creationId xmlns:a16="http://schemas.microsoft.com/office/drawing/2014/main" id="{D168FA85-1908-46B1-BBAA-3DDC84B8C529}"/>
               </a:ext>
             </a:extLst>
           </p:cNvPr>
@@ -7804,7 +7804,7 @@
           <p:cNvPr id="2" name="">
             <a:extLst xmlns:a="http://schemas.openxmlformats.org/drawingml/2006/main">
               <a:ext uri="{FF2B5EF4-FFF2-40B4-BE49-F238E27FC236}">
-                <a16:creationId xmlns:a16="http://schemas.microsoft.com/office/drawing/2014/main" id="{DD7A11D7-DC6A-4BAF-9A0D-6C019F5D47AD}"/>
+                <a16:creationId xmlns:a16="http://schemas.microsoft.com/office/drawing/2014/main" id="{C0E2D909-A971-4422-9CBB-989434392711}"/>
               </a:ext>
             </a:extLst>
           </p:cNvPr>
@@ -7861,7 +7861,7 @@
           <p:cNvPr id="3" name="">
             <a:extLst xmlns:a="http://schemas.openxmlformats.org/drawingml/2006/main">
               <a:ext uri="{FF2B5EF4-FFF2-40B4-BE49-F238E27FC236}">
-                <a16:creationId xmlns:a16="http://schemas.microsoft.com/office/drawing/2014/main" id="{F4C79E0B-778B-42E9-A55A-96A3EBBEFD4C}"/>
+                <a16:creationId xmlns:a16="http://schemas.microsoft.com/office/drawing/2014/main" id="{44AB3604-71DA-46F1-9101-E21B7AF8B0B8}"/>
               </a:ext>
             </a:extLst>
           </p:cNvPr>
@@ -7893,7 +7893,7 @@
           <p:cNvPr id="4" name="">
             <a:extLst xmlns:a="http://schemas.openxmlformats.org/drawingml/2006/main">
               <a:ext uri="{FF2B5EF4-FFF2-40B4-BE49-F238E27FC236}">
-                <a16:creationId xmlns:a16="http://schemas.microsoft.com/office/drawing/2014/main" id="{2D2DB49B-0254-403C-A6D4-47837EF080C0}"/>
+                <a16:creationId xmlns:a16="http://schemas.microsoft.com/office/drawing/2014/main" id="{98655DD9-F7F9-4820-B4B2-3D25F4AAC254}"/>
               </a:ext>
             </a:extLst>
           </p:cNvPr>
@@ -7950,7 +7950,7 @@
           <p:cNvPr id="5" name="">
             <a:extLst xmlns:a="http://schemas.openxmlformats.org/drawingml/2006/main">
               <a:ext uri="{FF2B5EF4-FFF2-40B4-BE49-F238E27FC236}">
-                <a16:creationId xmlns:a16="http://schemas.microsoft.com/office/drawing/2014/main" id="{2BF1C1AD-DFCA-4083-9E61-66C08FBF2002}"/>
+                <a16:creationId xmlns:a16="http://schemas.microsoft.com/office/drawing/2014/main" id="{C7711D4A-4BA4-4AE2-ADF3-0BA59F8B1EFC}"/>
               </a:ext>
             </a:extLst>
           </p:cNvPr>
@@ -8007,7 +8007,7 @@
           <p:cNvPr id="6" name="">
             <a:extLst xmlns:a="http://schemas.openxmlformats.org/drawingml/2006/main">
               <a:ext uri="{FF2B5EF4-FFF2-40B4-BE49-F238E27FC236}">
-                <a16:creationId xmlns:a16="http://schemas.microsoft.com/office/drawing/2014/main" id="{B36DFAD8-D84D-43DA-9609-B28574BCBED9}"/>
+                <a16:creationId xmlns:a16="http://schemas.microsoft.com/office/drawing/2014/main" id="{DCE898C2-A36D-4BC5-9868-9B2F3A0D57F8}"/>
               </a:ext>
             </a:extLst>
           </p:cNvPr>
@@ -8064,7 +8064,7 @@
           <p:cNvPr id="7" name="">
             <a:extLst xmlns:a="http://schemas.openxmlformats.org/drawingml/2006/main">
               <a:ext uri="{FF2B5EF4-FFF2-40B4-BE49-F238E27FC236}">
-                <a16:creationId xmlns:a16="http://schemas.microsoft.com/office/drawing/2014/main" id="{923B967F-3BD0-4C36-9DF0-59F1BFB07BBF}"/>
+                <a16:creationId xmlns:a16="http://schemas.microsoft.com/office/drawing/2014/main" id="{430D15D9-BE1D-43BF-AC53-A09F371C8054}"/>
               </a:ext>
             </a:extLst>
           </p:cNvPr>
@@ -8096,7 +8096,7 @@
           <p:cNvPr id="8" name="">
             <a:extLst xmlns:a="http://schemas.openxmlformats.org/drawingml/2006/main">
               <a:ext uri="{FF2B5EF4-FFF2-40B4-BE49-F238E27FC236}">
-                <a16:creationId xmlns:a16="http://schemas.microsoft.com/office/drawing/2014/main" id="{6584B3B5-E09A-4D67-9501-9685A64907F0}"/>
+                <a16:creationId xmlns:a16="http://schemas.microsoft.com/office/drawing/2014/main" id="{0455A233-1367-4CD4-B1EE-601F74CFF94E}"/>
               </a:ext>
             </a:extLst>
           </p:cNvPr>
@@ -8153,7 +8153,7 @@
           <p:cNvPr id="9" name="">
             <a:extLst xmlns:a="http://schemas.openxmlformats.org/drawingml/2006/main">
               <a:ext uri="{FF2B5EF4-FFF2-40B4-BE49-F238E27FC236}">
-                <a16:creationId xmlns:a16="http://schemas.microsoft.com/office/drawing/2014/main" id="{771E9BE3-2DA4-4093-94DD-EBB706AD88BA}"/>
+                <a16:creationId xmlns:a16="http://schemas.microsoft.com/office/drawing/2014/main" id="{575FB808-9C7A-4135-B7A6-3189EA8E75E8}"/>
               </a:ext>
             </a:extLst>
           </p:cNvPr>
@@ -8210,19 +8210,19 @@
           <p:cNvPr id="10" name="">
             <a:extLst xmlns:a="http://schemas.openxmlformats.org/drawingml/2006/main">
               <a:ext uri="{FF2B5EF4-FFF2-40B4-BE49-F238E27FC236}">
-                <a16:creationId xmlns:a16="http://schemas.microsoft.com/office/drawing/2014/main" id="{8E37189E-1CD2-40F0-8FF4-41AFB9AF9182}"/>
-              </a:ext>
-            </a:extLst>
-          </p:cNvPr>
-          <p:cNvSpPr>
-            <a:spLocks xmlns:a="http://schemas.openxmlformats.org/drawingml/2006/main" noGrp="1"/>
-          </p:cNvSpPr>
-          <p:nvPr/>
-        </p:nvSpPr>
-        <p:spPr>
-          <a:xfrm xmlns:a="http://schemas.openxmlformats.org/drawingml/2006/main">
-            <a:off x="914400" y="1257300"/>
-            <a:ext cx="10363200" cy="781050"/>
+                <a16:creationId xmlns:a16="http://schemas.microsoft.com/office/drawing/2014/main" id="{DD521956-875E-4AF7-93C1-F8AD45BF5E21}"/>
+              </a:ext>
+            </a:extLst>
+          </p:cNvPr>
+          <p:cNvSpPr>
+            <a:spLocks xmlns:a="http://schemas.openxmlformats.org/drawingml/2006/main" noGrp="1"/>
+          </p:cNvSpPr>
+          <p:nvPr/>
+        </p:nvSpPr>
+        <p:spPr>
+          <a:xfrm xmlns:a="http://schemas.openxmlformats.org/drawingml/2006/main">
+            <a:off x="857250" y="1219200"/>
+            <a:ext cx="10477500" cy="742950"/>
           </a:xfrm>
           <a:prstGeom xmlns:a="http://schemas.openxmlformats.org/drawingml/2006/main" prst="rect">
             <a:avLst/>
@@ -8239,7 +8239,7 @@
           <a:lstStyle xmlns:a="http://schemas.openxmlformats.org/drawingml/2006/main"/>
           <a:p xmlns:a="http://schemas.openxmlformats.org/drawingml/2006/main">
             <a:pPr algn="ctr">
-              <a:defRPr sz="2175" b="1">
+              <a:defRPr sz="2100" b="1">
                 <a:solidFill>
                   <a:srgbClr val="17253A"/>
                 </a:solidFill>
@@ -8249,7 +8249,7 @@
               </a:defRPr>
             </a:pPr>
             <a:r>
-              <a:rPr sz="2175" b="1">
+              <a:rPr sz="2100" b="1">
                 <a:solidFill>
                   <a:srgbClr val="17253A"/>
                 </a:solidFill>
@@ -8267,28 +8267,30 @@
           <p:cNvPr id="11" name="">
             <a:extLst xmlns:a="http://schemas.openxmlformats.org/drawingml/2006/main">
               <a:ext uri="{FF2B5EF4-FFF2-40B4-BE49-F238E27FC236}">
-                <a16:creationId xmlns:a16="http://schemas.microsoft.com/office/drawing/2014/main" id="{E9F05EE7-8147-4BEC-8798-E0D35E9BD07E}"/>
-              </a:ext>
-            </a:extLst>
-          </p:cNvPr>
-          <p:cNvSpPr>
-            <a:spLocks xmlns:a="http://schemas.openxmlformats.org/drawingml/2006/main" noGrp="1"/>
-          </p:cNvSpPr>
-          <p:nvPr/>
-        </p:nvSpPr>
-        <p:spPr>
-          <a:xfrm xmlns:a="http://schemas.openxmlformats.org/drawingml/2006/main">
-            <a:off x="1000125" y="2247900"/>
-            <a:ext cx="476250" cy="476250"/>
-          </a:xfrm>
-          <a:prstGeom xmlns:a="http://schemas.openxmlformats.org/drawingml/2006/main" prst="ellipse">
+                <a16:creationId xmlns:a16="http://schemas.microsoft.com/office/drawing/2014/main" id="{925A2A3C-CA3B-422D-8F8C-796E4596ABF5}"/>
+              </a:ext>
+            </a:extLst>
+          </p:cNvPr>
+          <p:cNvSpPr>
+            <a:spLocks xmlns:a="http://schemas.openxmlformats.org/drawingml/2006/main" noGrp="1"/>
+          </p:cNvSpPr>
+          <p:nvPr/>
+        </p:nvSpPr>
+        <p:spPr>
+          <a:xfrm xmlns:a="http://schemas.openxmlformats.org/drawingml/2006/main">
+            <a:off x="971550" y="2124075"/>
+            <a:ext cx="38100" cy="3524250"/>
+          </a:xfrm>
+          <a:prstGeom xmlns:a="http://schemas.openxmlformats.org/drawingml/2006/main" prst="rect">
             <a:avLst/>
           </a:prstGeom>
           <a:solidFill xmlns:a="http://schemas.openxmlformats.org/drawingml/2006/main">
-            <a:srgbClr val="18324A"/>
+            <a:srgbClr val="2C6E73"/>
           </a:solidFill>
           <a:ln xmlns:a="http://schemas.openxmlformats.org/drawingml/2006/main" w="0">
-            <a:noFill/>
+            <a:solidFill>
+              <a:srgbClr val="2C6E73"/>
+            </a:solidFill>
           </a:ln>
         </p:spPr>
       </p:sp>
@@ -8297,19 +8299,19 @@
           <p:cNvPr id="12" name="">
             <a:extLst xmlns:a="http://schemas.openxmlformats.org/drawingml/2006/main">
               <a:ext uri="{FF2B5EF4-FFF2-40B4-BE49-F238E27FC236}">
-                <a16:creationId xmlns:a16="http://schemas.microsoft.com/office/drawing/2014/main" id="{37A263DB-6842-42DA-9A00-679A97D64EB0}"/>
-              </a:ext>
-            </a:extLst>
-          </p:cNvPr>
-          <p:cNvSpPr>
-            <a:spLocks xmlns:a="http://schemas.openxmlformats.org/drawingml/2006/main" noGrp="1"/>
-          </p:cNvSpPr>
-          <p:nvPr/>
-        </p:nvSpPr>
-        <p:spPr>
-          <a:xfrm xmlns:a="http://schemas.openxmlformats.org/drawingml/2006/main">
-            <a:off x="1000125" y="2276475"/>
-            <a:ext cx="476250" cy="419100"/>
+                <a16:creationId xmlns:a16="http://schemas.microsoft.com/office/drawing/2014/main" id="{FDD9DCBC-C8A2-4B5F-9BE5-3400AF3ECACC}"/>
+              </a:ext>
+            </a:extLst>
+          </p:cNvPr>
+          <p:cNvSpPr>
+            <a:spLocks xmlns:a="http://schemas.openxmlformats.org/drawingml/2006/main" noGrp="1"/>
+          </p:cNvSpPr>
+          <p:nvPr/>
+        </p:nvSpPr>
+        <p:spPr>
+          <a:xfrm xmlns:a="http://schemas.openxmlformats.org/drawingml/2006/main">
+            <a:off x="1162050" y="2200275"/>
+            <a:ext cx="400050" cy="400050"/>
           </a:xfrm>
           <a:prstGeom xmlns:a="http://schemas.openxmlformats.org/drawingml/2006/main" prst="rect">
             <a:avLst/>
@@ -8326,9 +8328,9 @@
           <a:lstStyle xmlns:a="http://schemas.openxmlformats.org/drawingml/2006/main"/>
           <a:p xmlns:a="http://schemas.openxmlformats.org/drawingml/2006/main">
             <a:pPr algn="ctr">
-              <a:defRPr sz="1350" b="1">
-                <a:solidFill>
-                  <a:srgbClr val="FFFFFF"/>
+              <a:defRPr sz="1125" b="1">
+                <a:solidFill>
+                  <a:srgbClr val="2C6E73"/>
                 </a:solidFill>
                 <a:latin typeface="Arial"/>
                 <a:ea typeface="Arial"/>
@@ -8336,9 +8338,9 @@
               </a:defRPr>
             </a:pPr>
             <a:r>
-              <a:rPr sz="1350" b="1">
-                <a:solidFill>
-                  <a:srgbClr val="FFFFFF"/>
+              <a:rPr sz="1125" b="1">
+                <a:solidFill>
+                  <a:srgbClr val="2C6E73"/>
                 </a:solidFill>
                 <a:latin typeface="Arial"/>
                 <a:ea typeface="Arial"/>
@@ -8354,19 +8356,19 @@
           <p:cNvPr id="13" name="">
             <a:extLst xmlns:a="http://schemas.openxmlformats.org/drawingml/2006/main">
               <a:ext uri="{FF2B5EF4-FFF2-40B4-BE49-F238E27FC236}">
-                <a16:creationId xmlns:a16="http://schemas.microsoft.com/office/drawing/2014/main" id="{195009B5-70BF-477E-B51C-9684ECF161C5}"/>
-              </a:ext>
-            </a:extLst>
-          </p:cNvPr>
-          <p:cNvSpPr>
-            <a:spLocks xmlns:a="http://schemas.openxmlformats.org/drawingml/2006/main" noGrp="1"/>
-          </p:cNvSpPr>
-          <p:nvPr/>
-        </p:nvSpPr>
-        <p:spPr>
-          <a:xfrm xmlns:a="http://schemas.openxmlformats.org/drawingml/2006/main">
-            <a:off x="1714500" y="2181225"/>
-            <a:ext cx="9429750" cy="609600"/>
+                <a16:creationId xmlns:a16="http://schemas.microsoft.com/office/drawing/2014/main" id="{7DBF93DB-CC3F-4B2E-8427-65E355DED0CB}"/>
+              </a:ext>
+            </a:extLst>
+          </p:cNvPr>
+          <p:cNvSpPr>
+            <a:spLocks xmlns:a="http://schemas.openxmlformats.org/drawingml/2006/main" noGrp="1"/>
+          </p:cNvSpPr>
+          <p:nvPr/>
+        </p:nvSpPr>
+        <p:spPr>
+          <a:xfrm xmlns:a="http://schemas.openxmlformats.org/drawingml/2006/main">
+            <a:off x="1714500" y="2114550"/>
+            <a:ext cx="9525000" cy="809625"/>
           </a:xfrm>
           <a:prstGeom xmlns:a="http://schemas.openxmlformats.org/drawingml/2006/main" prst="rect">
             <a:avLst/>
@@ -8383,7 +8385,7 @@
           <a:lstStyle xmlns:a="http://schemas.openxmlformats.org/drawingml/2006/main"/>
           <a:p xmlns:a="http://schemas.openxmlformats.org/drawingml/2006/main">
             <a:pPr algn="l">
-              <a:defRPr sz="1500" b="0">
+              <a:defRPr sz="1725" b="0">
                 <a:solidFill>
                   <a:srgbClr val="17253A"/>
                 </a:solidFill>
@@ -8393,7 +8395,7 @@
               </a:defRPr>
             </a:pPr>
             <a:r>
-              <a:rPr sz="1500" b="0">
+              <a:rPr sz="1725" b="0">
                 <a:solidFill>
                   <a:srgbClr val="17253A"/>
                 </a:solidFill>
@@ -8401,7 +8403,7 @@
                 <a:ea typeface="Arial"/>
                 <a:cs typeface="Arial"/>
               </a:rPr>
-              <a:t>Identify the structure: Retrieve the relevant fact or method before answering.</a:t>
+              <a:t>24 = 2³ × 3     36 = 2² × 3²</a:t>
             </a:r>
           </a:p>
         </p:txBody>
@@ -8411,28 +8413,30 @@
           <p:cNvPr id="14" name="">
             <a:extLst xmlns:a="http://schemas.openxmlformats.org/drawingml/2006/main">
               <a:ext uri="{FF2B5EF4-FFF2-40B4-BE49-F238E27FC236}">
-                <a16:creationId xmlns:a16="http://schemas.microsoft.com/office/drawing/2014/main" id="{D12C0E94-6983-4BBA-8F20-45ED3BEA9094}"/>
-              </a:ext>
-            </a:extLst>
-          </p:cNvPr>
-          <p:cNvSpPr>
-            <a:spLocks xmlns:a="http://schemas.openxmlformats.org/drawingml/2006/main" noGrp="1"/>
-          </p:cNvSpPr>
-          <p:nvPr/>
-        </p:nvSpPr>
-        <p:spPr>
-          <a:xfrm xmlns:a="http://schemas.openxmlformats.org/drawingml/2006/main">
-            <a:off x="1000125" y="2990850"/>
-            <a:ext cx="476250" cy="476250"/>
-          </a:xfrm>
-          <a:prstGeom xmlns:a="http://schemas.openxmlformats.org/drawingml/2006/main" prst="ellipse">
+                <a16:creationId xmlns:a16="http://schemas.microsoft.com/office/drawing/2014/main" id="{E3A8E575-69AF-4A57-BA57-0B49A8539A6E}"/>
+              </a:ext>
+            </a:extLst>
+          </p:cNvPr>
+          <p:cNvSpPr>
+            <a:spLocks xmlns:a="http://schemas.openxmlformats.org/drawingml/2006/main" noGrp="1"/>
+          </p:cNvSpPr>
+          <p:nvPr/>
+        </p:nvSpPr>
+        <p:spPr>
+          <a:xfrm xmlns:a="http://schemas.openxmlformats.org/drawingml/2006/main">
+            <a:off x="1714500" y="2943225"/>
+            <a:ext cx="9334500" cy="9525"/>
+          </a:xfrm>
+          <a:prstGeom xmlns:a="http://schemas.openxmlformats.org/drawingml/2006/main" prst="rect">
             <a:avLst/>
           </a:prstGeom>
           <a:solidFill xmlns:a="http://schemas.openxmlformats.org/drawingml/2006/main">
-            <a:srgbClr val="2C6E73"/>
+            <a:srgbClr val="D9E0E6"/>
           </a:solidFill>
           <a:ln xmlns:a="http://schemas.openxmlformats.org/drawingml/2006/main" w="0">
-            <a:noFill/>
+            <a:solidFill>
+              <a:srgbClr val="D9E0E6"/>
+            </a:solidFill>
           </a:ln>
         </p:spPr>
       </p:sp>
@@ -8441,19 +8445,19 @@
           <p:cNvPr id="15" name="">
             <a:extLst xmlns:a="http://schemas.openxmlformats.org/drawingml/2006/main">
               <a:ext uri="{FF2B5EF4-FFF2-40B4-BE49-F238E27FC236}">
-                <a16:creationId xmlns:a16="http://schemas.microsoft.com/office/drawing/2014/main" id="{998715A1-4451-4C4A-BBFB-A6D7CCA0E36C}"/>
-              </a:ext>
-            </a:extLst>
-          </p:cNvPr>
-          <p:cNvSpPr>
-            <a:spLocks xmlns:a="http://schemas.openxmlformats.org/drawingml/2006/main" noGrp="1"/>
-          </p:cNvSpPr>
-          <p:nvPr/>
-        </p:nvSpPr>
-        <p:spPr>
-          <a:xfrm xmlns:a="http://schemas.openxmlformats.org/drawingml/2006/main">
-            <a:off x="1000125" y="3019425"/>
-            <a:ext cx="476250" cy="419100"/>
+                <a16:creationId xmlns:a16="http://schemas.microsoft.com/office/drawing/2014/main" id="{D2C13075-2643-4075-A566-A077790C5466}"/>
+              </a:ext>
+            </a:extLst>
+          </p:cNvPr>
+          <p:cNvSpPr>
+            <a:spLocks xmlns:a="http://schemas.openxmlformats.org/drawingml/2006/main" noGrp="1"/>
+          </p:cNvSpPr>
+          <p:nvPr/>
+        </p:nvSpPr>
+        <p:spPr>
+          <a:xfrm xmlns:a="http://schemas.openxmlformats.org/drawingml/2006/main">
+            <a:off x="1162050" y="3076575"/>
+            <a:ext cx="400050" cy="400050"/>
           </a:xfrm>
           <a:prstGeom xmlns:a="http://schemas.openxmlformats.org/drawingml/2006/main" prst="rect">
             <a:avLst/>
@@ -8470,9 +8474,9 @@
           <a:lstStyle xmlns:a="http://schemas.openxmlformats.org/drawingml/2006/main"/>
           <a:p xmlns:a="http://schemas.openxmlformats.org/drawingml/2006/main">
             <a:pPr algn="ctr">
-              <a:defRPr sz="1350" b="1">
-                <a:solidFill>
-                  <a:srgbClr val="FFFFFF"/>
+              <a:defRPr sz="1125" b="1">
+                <a:solidFill>
+                  <a:srgbClr val="2C6E73"/>
                 </a:solidFill>
                 <a:latin typeface="Arial"/>
                 <a:ea typeface="Arial"/>
@@ -8480,9 +8484,9 @@
               </a:defRPr>
             </a:pPr>
             <a:r>
-              <a:rPr sz="1350" b="1">
-                <a:solidFill>
-                  <a:srgbClr val="FFFFFF"/>
+              <a:rPr sz="1125" b="1">
+                <a:solidFill>
+                  <a:srgbClr val="2C6E73"/>
                 </a:solidFill>
                 <a:latin typeface="Arial"/>
                 <a:ea typeface="Arial"/>
@@ -8498,19 +8502,19 @@
           <p:cNvPr id="16" name="">
             <a:extLst xmlns:a="http://schemas.openxmlformats.org/drawingml/2006/main">
               <a:ext uri="{FF2B5EF4-FFF2-40B4-BE49-F238E27FC236}">
-                <a16:creationId xmlns:a16="http://schemas.microsoft.com/office/drawing/2014/main" id="{752050B4-3C54-4BB1-AE21-43960B2366AE}"/>
-              </a:ext>
-            </a:extLst>
-          </p:cNvPr>
-          <p:cNvSpPr>
-            <a:spLocks xmlns:a="http://schemas.openxmlformats.org/drawingml/2006/main" noGrp="1"/>
-          </p:cNvSpPr>
-          <p:nvPr/>
-        </p:nvSpPr>
-        <p:spPr>
-          <a:xfrm xmlns:a="http://schemas.openxmlformats.org/drawingml/2006/main">
-            <a:off x="1714500" y="2924175"/>
-            <a:ext cx="9429750" cy="609600"/>
+                <a16:creationId xmlns:a16="http://schemas.microsoft.com/office/drawing/2014/main" id="{9D506F12-A69A-4743-BCE8-C12DC7219CCC}"/>
+              </a:ext>
+            </a:extLst>
+          </p:cNvPr>
+          <p:cNvSpPr>
+            <a:spLocks xmlns:a="http://schemas.openxmlformats.org/drawingml/2006/main" noGrp="1"/>
+          </p:cNvSpPr>
+          <p:nvPr/>
+        </p:nvSpPr>
+        <p:spPr>
+          <a:xfrm xmlns:a="http://schemas.openxmlformats.org/drawingml/2006/main">
+            <a:off x="1714500" y="2990850"/>
+            <a:ext cx="9525000" cy="809625"/>
           </a:xfrm>
           <a:prstGeom xmlns:a="http://schemas.openxmlformats.org/drawingml/2006/main" prst="rect">
             <a:avLst/>
@@ -8527,7 +8531,7 @@
           <a:lstStyle xmlns:a="http://schemas.openxmlformats.org/drawingml/2006/main"/>
           <a:p xmlns:a="http://schemas.openxmlformats.org/drawingml/2006/main">
             <a:pPr algn="l">
-              <a:defRPr sz="1500" b="0">
+              <a:defRPr sz="1725" b="0">
                 <a:solidFill>
                   <a:srgbClr val="17253A"/>
                 </a:solidFill>
@@ -8537,7 +8541,7 @@
               </a:defRPr>
             </a:pPr>
             <a:r>
-              <a:rPr sz="1500" b="0">
+              <a:rPr sz="1725" b="0">
                 <a:solidFill>
                   <a:srgbClr val="17253A"/>
                 </a:solidFill>
@@ -8545,7 +8549,7 @@
                 <a:ea typeface="Arial"/>
                 <a:cs typeface="Arial"/>
               </a:rPr>
-              <a:t>Set up the method: Show a clear calculation or representation and explain the decision.</a:t>
+              <a:t>HCF uses shared lowest powers: 2² × 3 = 12</a:t>
             </a:r>
           </a:p>
         </p:txBody>
@@ -8555,28 +8559,30 @@
           <p:cNvPr id="17" name="">
             <a:extLst xmlns:a="http://schemas.openxmlformats.org/drawingml/2006/main">
               <a:ext uri="{FF2B5EF4-FFF2-40B4-BE49-F238E27FC236}">
-                <a16:creationId xmlns:a16="http://schemas.microsoft.com/office/drawing/2014/main" id="{A21832B6-5558-455A-AF2B-348070144280}"/>
-              </a:ext>
-            </a:extLst>
-          </p:cNvPr>
-          <p:cNvSpPr>
-            <a:spLocks xmlns:a="http://schemas.openxmlformats.org/drawingml/2006/main" noGrp="1"/>
-          </p:cNvSpPr>
-          <p:nvPr/>
-        </p:nvSpPr>
-        <p:spPr>
-          <a:xfrm xmlns:a="http://schemas.openxmlformats.org/drawingml/2006/main">
-            <a:off x="1000125" y="3733800"/>
-            <a:ext cx="476250" cy="476250"/>
-          </a:xfrm>
-          <a:prstGeom xmlns:a="http://schemas.openxmlformats.org/drawingml/2006/main" prst="ellipse">
+                <a16:creationId xmlns:a16="http://schemas.microsoft.com/office/drawing/2014/main" id="{5620551A-5526-460A-A88D-50D198009209}"/>
+              </a:ext>
+            </a:extLst>
+          </p:cNvPr>
+          <p:cNvSpPr>
+            <a:spLocks xmlns:a="http://schemas.openxmlformats.org/drawingml/2006/main" noGrp="1"/>
+          </p:cNvSpPr>
+          <p:nvPr/>
+        </p:nvSpPr>
+        <p:spPr>
+          <a:xfrm xmlns:a="http://schemas.openxmlformats.org/drawingml/2006/main">
+            <a:off x="1714500" y="3819525"/>
+            <a:ext cx="9334500" cy="9525"/>
+          </a:xfrm>
+          <a:prstGeom xmlns:a="http://schemas.openxmlformats.org/drawingml/2006/main" prst="rect">
             <a:avLst/>
           </a:prstGeom>
           <a:solidFill xmlns:a="http://schemas.openxmlformats.org/drawingml/2006/main">
-            <a:srgbClr val="2C6E73"/>
+            <a:srgbClr val="D9E0E6"/>
           </a:solidFill>
           <a:ln xmlns:a="http://schemas.openxmlformats.org/drawingml/2006/main" w="0">
-            <a:noFill/>
+            <a:solidFill>
+              <a:srgbClr val="D9E0E6"/>
+            </a:solidFill>
           </a:ln>
         </p:spPr>
       </p:sp>
@@ -8585,19 +8591,19 @@
           <p:cNvPr id="18" name="">
             <a:extLst xmlns:a="http://schemas.openxmlformats.org/drawingml/2006/main">
               <a:ext uri="{FF2B5EF4-FFF2-40B4-BE49-F238E27FC236}">
-                <a16:creationId xmlns:a16="http://schemas.microsoft.com/office/drawing/2014/main" id="{3555015F-9D15-4195-B7D4-17512A90F1FC}"/>
-              </a:ext>
-            </a:extLst>
-          </p:cNvPr>
-          <p:cNvSpPr>
-            <a:spLocks xmlns:a="http://schemas.openxmlformats.org/drawingml/2006/main" noGrp="1"/>
-          </p:cNvSpPr>
-          <p:nvPr/>
-        </p:nvSpPr>
-        <p:spPr>
-          <a:xfrm xmlns:a="http://schemas.openxmlformats.org/drawingml/2006/main">
-            <a:off x="1000125" y="3762375"/>
-            <a:ext cx="476250" cy="419100"/>
+                <a16:creationId xmlns:a16="http://schemas.microsoft.com/office/drawing/2014/main" id="{89E6F31B-A72B-4084-9DEF-A06A67E72C25}"/>
+              </a:ext>
+            </a:extLst>
+          </p:cNvPr>
+          <p:cNvSpPr>
+            <a:spLocks xmlns:a="http://schemas.openxmlformats.org/drawingml/2006/main" noGrp="1"/>
+          </p:cNvSpPr>
+          <p:nvPr/>
+        </p:nvSpPr>
+        <p:spPr>
+          <a:xfrm xmlns:a="http://schemas.openxmlformats.org/drawingml/2006/main">
+            <a:off x="1162050" y="3952875"/>
+            <a:ext cx="400050" cy="400050"/>
           </a:xfrm>
           <a:prstGeom xmlns:a="http://schemas.openxmlformats.org/drawingml/2006/main" prst="rect">
             <a:avLst/>
@@ -8614,9 +8620,9 @@
           <a:lstStyle xmlns:a="http://schemas.openxmlformats.org/drawingml/2006/main"/>
           <a:p xmlns:a="http://schemas.openxmlformats.org/drawingml/2006/main">
             <a:pPr algn="ctr">
-              <a:defRPr sz="1350" b="1">
-                <a:solidFill>
-                  <a:srgbClr val="FFFFFF"/>
+              <a:defRPr sz="1125" b="1">
+                <a:solidFill>
+                  <a:srgbClr val="2C6E73"/>
                 </a:solidFill>
                 <a:latin typeface="Arial"/>
                 <a:ea typeface="Arial"/>
@@ -8624,9 +8630,9 @@
               </a:defRPr>
             </a:pPr>
             <a:r>
-              <a:rPr sz="1350" b="1">
-                <a:solidFill>
-                  <a:srgbClr val="FFFFFF"/>
+              <a:rPr sz="1125" b="1">
+                <a:solidFill>
+                  <a:srgbClr val="2C6E73"/>
                 </a:solidFill>
                 <a:latin typeface="Arial"/>
                 <a:ea typeface="Arial"/>
@@ -8642,19 +8648,19 @@
           <p:cNvPr id="19" name="">
             <a:extLst xmlns:a="http://schemas.openxmlformats.org/drawingml/2006/main">
               <a:ext uri="{FF2B5EF4-FFF2-40B4-BE49-F238E27FC236}">
-                <a16:creationId xmlns:a16="http://schemas.microsoft.com/office/drawing/2014/main" id="{0B9C3ADA-D161-44D6-B29A-BF1FE23CF63C}"/>
-              </a:ext>
-            </a:extLst>
-          </p:cNvPr>
-          <p:cNvSpPr>
-            <a:spLocks xmlns:a="http://schemas.openxmlformats.org/drawingml/2006/main" noGrp="1"/>
-          </p:cNvSpPr>
-          <p:nvPr/>
-        </p:nvSpPr>
-        <p:spPr>
-          <a:xfrm xmlns:a="http://schemas.openxmlformats.org/drawingml/2006/main">
-            <a:off x="1714500" y="3667125"/>
-            <a:ext cx="9429750" cy="609600"/>
+                <a16:creationId xmlns:a16="http://schemas.microsoft.com/office/drawing/2014/main" id="{8AA28234-16D6-43E1-99A3-A2C10B71AE68}"/>
+              </a:ext>
+            </a:extLst>
+          </p:cNvPr>
+          <p:cNvSpPr>
+            <a:spLocks xmlns:a="http://schemas.openxmlformats.org/drawingml/2006/main" noGrp="1"/>
+          </p:cNvSpPr>
+          <p:nvPr/>
+        </p:nvSpPr>
+        <p:spPr>
+          <a:xfrm xmlns:a="http://schemas.openxmlformats.org/drawingml/2006/main">
+            <a:off x="1714500" y="3867150"/>
+            <a:ext cx="9525000" cy="809625"/>
           </a:xfrm>
           <a:prstGeom xmlns:a="http://schemas.openxmlformats.org/drawingml/2006/main" prst="rect">
             <a:avLst/>
@@ -8671,7 +8677,7 @@
           <a:lstStyle xmlns:a="http://schemas.openxmlformats.org/drawingml/2006/main"/>
           <a:p xmlns:a="http://schemas.openxmlformats.org/drawingml/2006/main">
             <a:pPr algn="l">
-              <a:defRPr sz="1500" b="0">
+              <a:defRPr sz="1725" b="0">
                 <a:solidFill>
                   <a:srgbClr val="17253A"/>
                 </a:solidFill>
@@ -8681,7 +8687,7 @@
               </a:defRPr>
             </a:pPr>
             <a:r>
-              <a:rPr sz="1500" b="0">
+              <a:rPr sz="1725" b="0">
                 <a:solidFill>
                   <a:srgbClr val="17253A"/>
                 </a:solidFill>
@@ -8689,7 +8695,7 @@
                 <a:ea typeface="Arial"/>
                 <a:cs typeface="Arial"/>
               </a:rPr>
-              <a:t>Complete the calculation: HCF 12; LCM 72.</a:t>
+              <a:t>LCM uses highest powers: 2³ × 3²</a:t>
             </a:r>
           </a:p>
         </p:txBody>
@@ -8699,28 +8705,30 @@
           <p:cNvPr id="20" name="">
             <a:extLst xmlns:a="http://schemas.openxmlformats.org/drawingml/2006/main">
               <a:ext uri="{FF2B5EF4-FFF2-40B4-BE49-F238E27FC236}">
-                <a16:creationId xmlns:a16="http://schemas.microsoft.com/office/drawing/2014/main" id="{72B18CA7-7A39-4C7B-9021-04650C16F989}"/>
-              </a:ext>
-            </a:extLst>
-          </p:cNvPr>
-          <p:cNvSpPr>
-            <a:spLocks xmlns:a="http://schemas.openxmlformats.org/drawingml/2006/main" noGrp="1"/>
-          </p:cNvSpPr>
-          <p:nvPr/>
-        </p:nvSpPr>
-        <p:spPr>
-          <a:xfrm xmlns:a="http://schemas.openxmlformats.org/drawingml/2006/main">
-            <a:off x="1000125" y="4476750"/>
-            <a:ext cx="476250" cy="476250"/>
-          </a:xfrm>
-          <a:prstGeom xmlns:a="http://schemas.openxmlformats.org/drawingml/2006/main" prst="ellipse">
+                <a16:creationId xmlns:a16="http://schemas.microsoft.com/office/drawing/2014/main" id="{AFCEC25E-8531-43FF-B5A8-A38139E18FEB}"/>
+              </a:ext>
+            </a:extLst>
+          </p:cNvPr>
+          <p:cNvSpPr>
+            <a:spLocks xmlns:a="http://schemas.openxmlformats.org/drawingml/2006/main" noGrp="1"/>
+          </p:cNvSpPr>
+          <p:nvPr/>
+        </p:nvSpPr>
+        <p:spPr>
+          <a:xfrm xmlns:a="http://schemas.openxmlformats.org/drawingml/2006/main">
+            <a:off x="1714500" y="4695825"/>
+            <a:ext cx="9334500" cy="9525"/>
+          </a:xfrm>
+          <a:prstGeom xmlns:a="http://schemas.openxmlformats.org/drawingml/2006/main" prst="rect">
             <a:avLst/>
           </a:prstGeom>
           <a:solidFill xmlns:a="http://schemas.openxmlformats.org/drawingml/2006/main">
-            <a:srgbClr val="2C6E73"/>
+            <a:srgbClr val="D9E0E6"/>
           </a:solidFill>
           <a:ln xmlns:a="http://schemas.openxmlformats.org/drawingml/2006/main" w="0">
-            <a:noFill/>
+            <a:solidFill>
+              <a:srgbClr val="D9E0E6"/>
+            </a:solidFill>
           </a:ln>
         </p:spPr>
       </p:sp>
@@ -8729,19 +8737,19 @@
           <p:cNvPr id="21" name="">
             <a:extLst xmlns:a="http://schemas.openxmlformats.org/drawingml/2006/main">
               <a:ext uri="{FF2B5EF4-FFF2-40B4-BE49-F238E27FC236}">
-                <a16:creationId xmlns:a16="http://schemas.microsoft.com/office/drawing/2014/main" id="{1AA16EBF-942E-482D-9C59-D2350811B68B}"/>
-              </a:ext>
-            </a:extLst>
-          </p:cNvPr>
-          <p:cNvSpPr>
-            <a:spLocks xmlns:a="http://schemas.openxmlformats.org/drawingml/2006/main" noGrp="1"/>
-          </p:cNvSpPr>
-          <p:nvPr/>
-        </p:nvSpPr>
-        <p:spPr>
-          <a:xfrm xmlns:a="http://schemas.openxmlformats.org/drawingml/2006/main">
-            <a:off x="1000125" y="4505325"/>
-            <a:ext cx="476250" cy="419100"/>
+                <a16:creationId xmlns:a16="http://schemas.microsoft.com/office/drawing/2014/main" id="{FB815C4C-23DB-44E3-8AD9-9D52423D08A6}"/>
+              </a:ext>
+            </a:extLst>
+          </p:cNvPr>
+          <p:cNvSpPr>
+            <a:spLocks xmlns:a="http://schemas.openxmlformats.org/drawingml/2006/main" noGrp="1"/>
+          </p:cNvSpPr>
+          <p:nvPr/>
+        </p:nvSpPr>
+        <p:spPr>
+          <a:xfrm xmlns:a="http://schemas.openxmlformats.org/drawingml/2006/main">
+            <a:off x="1162050" y="4829175"/>
+            <a:ext cx="400050" cy="400050"/>
           </a:xfrm>
           <a:prstGeom xmlns:a="http://schemas.openxmlformats.org/drawingml/2006/main" prst="rect">
             <a:avLst/>
@@ -8758,9 +8766,9 @@
           <a:lstStyle xmlns:a="http://schemas.openxmlformats.org/drawingml/2006/main"/>
           <a:p xmlns:a="http://schemas.openxmlformats.org/drawingml/2006/main">
             <a:pPr algn="ctr">
-              <a:defRPr sz="1350" b="1">
-                <a:solidFill>
-                  <a:srgbClr val="FFFFFF"/>
+              <a:defRPr sz="1125" b="1">
+                <a:solidFill>
+                  <a:srgbClr val="2F785D"/>
                 </a:solidFill>
                 <a:latin typeface="Arial"/>
                 <a:ea typeface="Arial"/>
@@ -8768,9 +8776,9 @@
               </a:defRPr>
             </a:pPr>
             <a:r>
-              <a:rPr sz="1350" b="1">
-                <a:solidFill>
-                  <a:srgbClr val="FFFFFF"/>
+              <a:rPr sz="1125" b="1">
+                <a:solidFill>
+                  <a:srgbClr val="2F785D"/>
                 </a:solidFill>
                 <a:latin typeface="Arial"/>
                 <a:ea typeface="Arial"/>
@@ -8786,19 +8794,19 @@
           <p:cNvPr id="22" name="">
             <a:extLst xmlns:a="http://schemas.openxmlformats.org/drawingml/2006/main">
               <a:ext uri="{FF2B5EF4-FFF2-40B4-BE49-F238E27FC236}">
-                <a16:creationId xmlns:a16="http://schemas.microsoft.com/office/drawing/2014/main" id="{B72AB356-5C36-4EA5-AEA2-9BBE885EB504}"/>
-              </a:ext>
-            </a:extLst>
-          </p:cNvPr>
-          <p:cNvSpPr>
-            <a:spLocks xmlns:a="http://schemas.openxmlformats.org/drawingml/2006/main" noGrp="1"/>
-          </p:cNvSpPr>
-          <p:nvPr/>
-        </p:nvSpPr>
-        <p:spPr>
-          <a:xfrm xmlns:a="http://schemas.openxmlformats.org/drawingml/2006/main">
-            <a:off x="1714500" y="4410075"/>
-            <a:ext cx="9429750" cy="609600"/>
+                <a16:creationId xmlns:a16="http://schemas.microsoft.com/office/drawing/2014/main" id="{79F870D8-4BCF-4A14-84D3-FCF196D99969}"/>
+              </a:ext>
+            </a:extLst>
+          </p:cNvPr>
+          <p:cNvSpPr>
+            <a:spLocks xmlns:a="http://schemas.openxmlformats.org/drawingml/2006/main" noGrp="1"/>
+          </p:cNvSpPr>
+          <p:nvPr/>
+        </p:nvSpPr>
+        <p:spPr>
+          <a:xfrm xmlns:a="http://schemas.openxmlformats.org/drawingml/2006/main">
+            <a:off x="1714500" y="4743450"/>
+            <a:ext cx="9525000" cy="809625"/>
           </a:xfrm>
           <a:prstGeom xmlns:a="http://schemas.openxmlformats.org/drawingml/2006/main" prst="rect">
             <a:avLst/>
@@ -8815,7 +8823,7 @@
           <a:lstStyle xmlns:a="http://schemas.openxmlformats.org/drawingml/2006/main"/>
           <a:p xmlns:a="http://schemas.openxmlformats.org/drawingml/2006/main">
             <a:pPr algn="l">
-              <a:defRPr sz="1500" b="1">
+              <a:defRPr sz="1725" b="1">
                 <a:solidFill>
                   <a:srgbClr val="2F785D"/>
                 </a:solidFill>
@@ -8825,7 +8833,7 @@
               </a:defRPr>
             </a:pPr>
             <a:r>
-              <a:rPr sz="1500" b="1">
+              <a:rPr sz="1725" b="1">
                 <a:solidFill>
                   <a:srgbClr val="2F785D"/>
                 </a:solidFill>
@@ -8833,7 +8841,7 @@
                 <a:ea typeface="Arial"/>
                 <a:cs typeface="Arial"/>
               </a:rPr>
-              <a:t>Check the result: Check the result, identify any misconception and record the next step.</a:t>
+              <a:t>LCM = 72</a:t>
             </a:r>
           </a:p>
         </p:txBody>
@@ -8841,7 +8849,7 @@
     </p:spTree>
     <p:extLst>
       <p:ext uri="{BB962C8B-B14F-4D97-AF65-F5344CB8AC3E}">
-        <p14:creationId xmlns:p14="http://schemas.microsoft.com/office/powerpoint/2010/main" val="928705991"/>
+        <p14:creationId xmlns:p14="http://schemas.microsoft.com/office/powerpoint/2010/main" val="1985521361"/>
       </p:ext>
     </p:extLst>
   </p:cSld>
@@ -9134,7 +9142,7 @@
           <p:cNvPr id="15" name="">
             <a:extLst xmlns:a="http://schemas.openxmlformats.org/drawingml/2006/main">
               <a:ext uri="{FF2B5EF4-FFF2-40B4-BE49-F238E27FC236}">
-                <a16:creationId xmlns:a16="http://schemas.microsoft.com/office/drawing/2014/main" id="{BE540B47-4392-4619-B4DE-4D9161236823}"/>
+                <a16:creationId xmlns:a16="http://schemas.microsoft.com/office/drawing/2014/main" id="{BAE10950-94DB-4539-80D0-A1C6A820E5F9}"/>
               </a:ext>
             </a:extLst>
           </p:cNvPr>
@@ -9166,7 +9174,7 @@
           <p:cNvPr id="2" name="">
             <a:extLst xmlns:a="http://schemas.openxmlformats.org/drawingml/2006/main">
               <a:ext uri="{FF2B5EF4-FFF2-40B4-BE49-F238E27FC236}">
-                <a16:creationId xmlns:a16="http://schemas.microsoft.com/office/drawing/2014/main" id="{38678E16-386F-4CC7-9D34-7E51207E2DF7}"/>
+                <a16:creationId xmlns:a16="http://schemas.microsoft.com/office/drawing/2014/main" id="{5A9C8697-0113-4E33-B5F4-EBFC5774E702}"/>
               </a:ext>
             </a:extLst>
           </p:cNvPr>
@@ -9223,7 +9231,7 @@
           <p:cNvPr id="3" name="">
             <a:extLst xmlns:a="http://schemas.openxmlformats.org/drawingml/2006/main">
               <a:ext uri="{FF2B5EF4-FFF2-40B4-BE49-F238E27FC236}">
-                <a16:creationId xmlns:a16="http://schemas.microsoft.com/office/drawing/2014/main" id="{D0838A76-B767-4E06-806E-50361A213CA7}"/>
+                <a16:creationId xmlns:a16="http://schemas.microsoft.com/office/drawing/2014/main" id="{A31FD19D-292A-4959-8021-FDE48EE0E008}"/>
               </a:ext>
             </a:extLst>
           </p:cNvPr>
@@ -9255,7 +9263,7 @@
           <p:cNvPr id="4" name="">
             <a:extLst xmlns:a="http://schemas.openxmlformats.org/drawingml/2006/main">
               <a:ext uri="{FF2B5EF4-FFF2-40B4-BE49-F238E27FC236}">
-                <a16:creationId xmlns:a16="http://schemas.microsoft.com/office/drawing/2014/main" id="{86D888FA-5F46-447C-B792-022A50BADB27}"/>
+                <a16:creationId xmlns:a16="http://schemas.microsoft.com/office/drawing/2014/main" id="{6587F9C7-7024-4C55-A4DD-63B84B920F0C}"/>
               </a:ext>
             </a:extLst>
           </p:cNvPr>
@@ -9312,7 +9320,7 @@
           <p:cNvPr id="5" name="">
             <a:extLst xmlns:a="http://schemas.openxmlformats.org/drawingml/2006/main">
               <a:ext uri="{FF2B5EF4-FFF2-40B4-BE49-F238E27FC236}">
-                <a16:creationId xmlns:a16="http://schemas.microsoft.com/office/drawing/2014/main" id="{53509EF6-AB5C-4C5E-91E6-23DA0E8D97ED}"/>
+                <a16:creationId xmlns:a16="http://schemas.microsoft.com/office/drawing/2014/main" id="{57BF917B-5D2F-4B10-8F6D-C50DFD324F58}"/>
               </a:ext>
             </a:extLst>
           </p:cNvPr>
@@ -9369,7 +9377,7 @@
           <p:cNvPr id="6" name="">
             <a:extLst xmlns:a="http://schemas.openxmlformats.org/drawingml/2006/main">
               <a:ext uri="{FF2B5EF4-FFF2-40B4-BE49-F238E27FC236}">
-                <a16:creationId xmlns:a16="http://schemas.microsoft.com/office/drawing/2014/main" id="{252D8533-0312-412B-8DD7-AEDEE3721079}"/>
+                <a16:creationId xmlns:a16="http://schemas.microsoft.com/office/drawing/2014/main" id="{BB8BFF53-784A-4575-899C-FAA3D999BE3A}"/>
               </a:ext>
             </a:extLst>
           </p:cNvPr>
@@ -9426,7 +9434,7 @@
           <p:cNvPr id="7" name="">
             <a:extLst xmlns:a="http://schemas.openxmlformats.org/drawingml/2006/main">
               <a:ext uri="{FF2B5EF4-FFF2-40B4-BE49-F238E27FC236}">
-                <a16:creationId xmlns:a16="http://schemas.microsoft.com/office/drawing/2014/main" id="{8385AD18-3AD6-4083-B8E6-908B9E8CB730}"/>
+                <a16:creationId xmlns:a16="http://schemas.microsoft.com/office/drawing/2014/main" id="{0BABB35E-5EF9-4DAD-A52C-C9E854029BD9}"/>
               </a:ext>
             </a:extLst>
           </p:cNvPr>
@@ -9458,7 +9466,7 @@
           <p:cNvPr id="8" name="">
             <a:extLst xmlns:a="http://schemas.openxmlformats.org/drawingml/2006/main">
               <a:ext uri="{FF2B5EF4-FFF2-40B4-BE49-F238E27FC236}">
-                <a16:creationId xmlns:a16="http://schemas.microsoft.com/office/drawing/2014/main" id="{CEB7A8A5-58F3-47E4-A58A-4FEE0DB4776E}"/>
+                <a16:creationId xmlns:a16="http://schemas.microsoft.com/office/drawing/2014/main" id="{20D84BBD-16E5-4A96-BB5F-A8A760325321}"/>
               </a:ext>
             </a:extLst>
           </p:cNvPr>
@@ -9515,7 +9523,7 @@
           <p:cNvPr id="9" name="">
             <a:extLst xmlns:a="http://schemas.openxmlformats.org/drawingml/2006/main">
               <a:ext uri="{FF2B5EF4-FFF2-40B4-BE49-F238E27FC236}">
-                <a16:creationId xmlns:a16="http://schemas.microsoft.com/office/drawing/2014/main" id="{E082905B-E945-4674-BB30-1CB41FE1D445}"/>
+                <a16:creationId xmlns:a16="http://schemas.microsoft.com/office/drawing/2014/main" id="{A07E7755-430C-4B07-8FFF-6D98AEB622D4}"/>
               </a:ext>
             </a:extLst>
           </p:cNvPr>
@@ -9572,7 +9580,7 @@
           <p:cNvPr id="10" name="">
             <a:extLst xmlns:a="http://schemas.openxmlformats.org/drawingml/2006/main">
               <a:ext uri="{FF2B5EF4-FFF2-40B4-BE49-F238E27FC236}">
-                <a16:creationId xmlns:a16="http://schemas.microsoft.com/office/drawing/2014/main" id="{9845BB62-535F-423F-9626-360B8C54454B}"/>
+                <a16:creationId xmlns:a16="http://schemas.microsoft.com/office/drawing/2014/main" id="{E14DBAD5-4CDC-4504-8D8A-5D90083AAF50}"/>
               </a:ext>
             </a:extLst>
           </p:cNvPr>
@@ -9629,7 +9637,7 @@
           <p:cNvPr id="11" name="">
             <a:extLst xmlns:a="http://schemas.openxmlformats.org/drawingml/2006/main">
               <a:ext uri="{FF2B5EF4-FFF2-40B4-BE49-F238E27FC236}">
-                <a16:creationId xmlns:a16="http://schemas.microsoft.com/office/drawing/2014/main" id="{0B15D47E-0962-4D2B-A56F-4C2BDE1A3088}"/>
+                <a16:creationId xmlns:a16="http://schemas.microsoft.com/office/drawing/2014/main" id="{BF1948A6-4F71-4FE9-AAEB-21EC9EE91FF8}"/>
               </a:ext>
             </a:extLst>
           </p:cNvPr>
@@ -9686,7 +9694,7 @@
           <p:cNvPr id="12" name="">
             <a:extLst xmlns:a="http://schemas.openxmlformats.org/drawingml/2006/main">
               <a:ext uri="{FF2B5EF4-FFF2-40B4-BE49-F238E27FC236}">
-                <a16:creationId xmlns:a16="http://schemas.microsoft.com/office/drawing/2014/main" id="{FDB11A38-1DC5-419C-85C9-38E4BB4FE9F7}"/>
+                <a16:creationId xmlns:a16="http://schemas.microsoft.com/office/drawing/2014/main" id="{1FBBDC5C-6821-49DF-AA35-3F0BCC3024A4}"/>
               </a:ext>
             </a:extLst>
           </p:cNvPr>
@@ -9718,7 +9726,7 @@
           <p:cNvPr id="13" name="">
             <a:extLst xmlns:a="http://schemas.openxmlformats.org/drawingml/2006/main">
               <a:ext uri="{FF2B5EF4-FFF2-40B4-BE49-F238E27FC236}">
-                <a16:creationId xmlns:a16="http://schemas.microsoft.com/office/drawing/2014/main" id="{2D3E1153-B1AE-4A93-A1F1-2A4803E6E0BE}"/>
+                <a16:creationId xmlns:a16="http://schemas.microsoft.com/office/drawing/2014/main" id="{A6D3C8E1-BD86-49D4-A342-C08EBAFF9D15}"/>
               </a:ext>
             </a:extLst>
           </p:cNvPr>
@@ -9775,7 +9783,7 @@
           <p:cNvPr id="14" name="">
             <a:extLst xmlns:a="http://schemas.openxmlformats.org/drawingml/2006/main">
               <a:ext uri="{FF2B5EF4-FFF2-40B4-BE49-F238E27FC236}">
-                <a16:creationId xmlns:a16="http://schemas.microsoft.com/office/drawing/2014/main" id="{0388D3F6-93DB-4A93-9447-FD10CBA1BA87}"/>
+                <a16:creationId xmlns:a16="http://schemas.microsoft.com/office/drawing/2014/main" id="{809BD9E8-7207-4645-A5FF-2EA488585B65}"/>
               </a:ext>
             </a:extLst>
           </p:cNvPr>
@@ -9830,7 +9838,7 @@
     </p:spTree>
     <p:extLst>
       <p:ext uri="{BB962C8B-B14F-4D97-AF65-F5344CB8AC3E}">
-        <p14:creationId xmlns:p14="http://schemas.microsoft.com/office/powerpoint/2010/main" val="535544246"/>
+        <p14:creationId xmlns:p14="http://schemas.microsoft.com/office/powerpoint/2010/main" val="2086110696"/>
       </p:ext>
     </p:extLst>
   </p:cSld>
@@ -10031,7 +10039,7 @@
           <p:cNvPr id="16" name="">
             <a:extLst xmlns:a="http://schemas.openxmlformats.org/drawingml/2006/main">
               <a:ext uri="{FF2B5EF4-FFF2-40B4-BE49-F238E27FC236}">
-                <a16:creationId xmlns:a16="http://schemas.microsoft.com/office/drawing/2014/main" id="{255CB06F-746A-45D3-B86F-DBB5D36B5F62}"/>
+                <a16:creationId xmlns:a16="http://schemas.microsoft.com/office/drawing/2014/main" id="{5600BF11-BA13-4774-919C-59F8ED2E8E40}"/>
               </a:ext>
             </a:extLst>
           </p:cNvPr>
@@ -10063,7 +10071,7 @@
           <p:cNvPr id="2" name="">
             <a:extLst xmlns:a="http://schemas.openxmlformats.org/drawingml/2006/main">
               <a:ext uri="{FF2B5EF4-FFF2-40B4-BE49-F238E27FC236}">
-                <a16:creationId xmlns:a16="http://schemas.microsoft.com/office/drawing/2014/main" id="{3C8671FC-E1DE-45FB-B19E-A9CDF18BE108}"/>
+                <a16:creationId xmlns:a16="http://schemas.microsoft.com/office/drawing/2014/main" id="{151CC3CF-1FAF-48BE-AD8F-0BD0330A0D3F}"/>
               </a:ext>
             </a:extLst>
           </p:cNvPr>
@@ -10120,7 +10128,7 @@
           <p:cNvPr id="3" name="">
             <a:extLst xmlns:a="http://schemas.openxmlformats.org/drawingml/2006/main">
               <a:ext uri="{FF2B5EF4-FFF2-40B4-BE49-F238E27FC236}">
-                <a16:creationId xmlns:a16="http://schemas.microsoft.com/office/drawing/2014/main" id="{63D17455-C729-4D58-82A4-2AE5D2EBB008}"/>
+                <a16:creationId xmlns:a16="http://schemas.microsoft.com/office/drawing/2014/main" id="{C1239C57-74F1-4380-9494-71553D30CE6D}"/>
               </a:ext>
             </a:extLst>
           </p:cNvPr>
@@ -10152,7 +10160,7 @@
           <p:cNvPr id="4" name="">
             <a:extLst xmlns:a="http://schemas.openxmlformats.org/drawingml/2006/main">
               <a:ext uri="{FF2B5EF4-FFF2-40B4-BE49-F238E27FC236}">
-                <a16:creationId xmlns:a16="http://schemas.microsoft.com/office/drawing/2014/main" id="{18D4C5AD-2BC5-4859-8BFE-87113109AA3D}"/>
+                <a16:creationId xmlns:a16="http://schemas.microsoft.com/office/drawing/2014/main" id="{AD6507C1-83AC-46BB-863D-6A9B99CFE690}"/>
               </a:ext>
             </a:extLst>
           </p:cNvPr>
@@ -10209,7 +10217,7 @@
           <p:cNvPr id="5" name="">
             <a:extLst xmlns:a="http://schemas.openxmlformats.org/drawingml/2006/main">
               <a:ext uri="{FF2B5EF4-FFF2-40B4-BE49-F238E27FC236}">
-                <a16:creationId xmlns:a16="http://schemas.microsoft.com/office/drawing/2014/main" id="{C0576F1E-D386-4CCB-A4B0-514D49DA7A08}"/>
+                <a16:creationId xmlns:a16="http://schemas.microsoft.com/office/drawing/2014/main" id="{8E56843A-3CE3-4EDD-89A4-98A8BC204DC0}"/>
               </a:ext>
             </a:extLst>
           </p:cNvPr>
@@ -10266,7 +10274,7 @@
           <p:cNvPr id="6" name="">
             <a:extLst xmlns:a="http://schemas.openxmlformats.org/drawingml/2006/main">
               <a:ext uri="{FF2B5EF4-FFF2-40B4-BE49-F238E27FC236}">
-                <a16:creationId xmlns:a16="http://schemas.microsoft.com/office/drawing/2014/main" id="{36398E3C-2DD8-403D-B87F-39235F7C498A}"/>
+                <a16:creationId xmlns:a16="http://schemas.microsoft.com/office/drawing/2014/main" id="{BDFEF0B0-44B0-4B58-9A75-68B053ACC795}"/>
               </a:ext>
             </a:extLst>
           </p:cNvPr>
@@ -10323,7 +10331,7 @@
           <p:cNvPr id="7" name="">
             <a:extLst xmlns:a="http://schemas.openxmlformats.org/drawingml/2006/main">
               <a:ext uri="{FF2B5EF4-FFF2-40B4-BE49-F238E27FC236}">
-                <a16:creationId xmlns:a16="http://schemas.microsoft.com/office/drawing/2014/main" id="{BC291291-552E-44B4-9574-B6901967FBBA}"/>
+                <a16:creationId xmlns:a16="http://schemas.microsoft.com/office/drawing/2014/main" id="{4F047A0A-1824-496C-BAF5-9835F0F114BF}"/>
               </a:ext>
             </a:extLst>
           </p:cNvPr>
@@ -10355,7 +10363,7 @@
           <p:cNvPr id="8" name="">
             <a:extLst xmlns:a="http://schemas.openxmlformats.org/drawingml/2006/main">
               <a:ext uri="{FF2B5EF4-FFF2-40B4-BE49-F238E27FC236}">
-                <a16:creationId xmlns:a16="http://schemas.microsoft.com/office/drawing/2014/main" id="{00D12704-C8DD-475F-8285-55D1F84C82D3}"/>
+                <a16:creationId xmlns:a16="http://schemas.microsoft.com/office/drawing/2014/main" id="{F84BF648-EB2A-43F8-BE21-6570285DE3A3}"/>
               </a:ext>
             </a:extLst>
           </p:cNvPr>
@@ -10412,7 +10420,7 @@
           <p:cNvPr id="9" name="">
             <a:extLst xmlns:a="http://schemas.openxmlformats.org/drawingml/2006/main">
               <a:ext uri="{FF2B5EF4-FFF2-40B4-BE49-F238E27FC236}">
-                <a16:creationId xmlns:a16="http://schemas.microsoft.com/office/drawing/2014/main" id="{A6D91E09-0770-4509-825D-A244C8471858}"/>
+                <a16:creationId xmlns:a16="http://schemas.microsoft.com/office/drawing/2014/main" id="{F5B96DF8-185D-4D6D-B577-DEB864D9CFF5}"/>
               </a:ext>
             </a:extLst>
           </p:cNvPr>
@@ -10469,7 +10477,7 @@
           <p:cNvPr id="10" name="">
             <a:extLst xmlns:a="http://schemas.openxmlformats.org/drawingml/2006/main">
               <a:ext uri="{FF2B5EF4-FFF2-40B4-BE49-F238E27FC236}">
-                <a16:creationId xmlns:a16="http://schemas.microsoft.com/office/drawing/2014/main" id="{48FE3C27-5C12-4D6D-878C-F8C35C947880}"/>
+                <a16:creationId xmlns:a16="http://schemas.microsoft.com/office/drawing/2014/main" id="{6922B142-6B2D-424E-B07F-E356F98F302E}"/>
               </a:ext>
             </a:extLst>
           </p:cNvPr>
@@ -10526,7 +10534,7 @@
           <p:cNvPr id="11" name="">
             <a:extLst xmlns:a="http://schemas.openxmlformats.org/drawingml/2006/main">
               <a:ext uri="{FF2B5EF4-FFF2-40B4-BE49-F238E27FC236}">
-                <a16:creationId xmlns:a16="http://schemas.microsoft.com/office/drawing/2014/main" id="{7EB4635F-3DE5-4A9F-B14D-D03B48643C92}"/>
+                <a16:creationId xmlns:a16="http://schemas.microsoft.com/office/drawing/2014/main" id="{C942CC9E-39C6-4E76-ADAC-B12407CF0EEA}"/>
               </a:ext>
             </a:extLst>
           </p:cNvPr>
@@ -10583,7 +10591,7 @@
           <p:cNvPr id="12" name="">
             <a:extLst xmlns:a="http://schemas.openxmlformats.org/drawingml/2006/main">
               <a:ext uri="{FF2B5EF4-FFF2-40B4-BE49-F238E27FC236}">
-                <a16:creationId xmlns:a16="http://schemas.microsoft.com/office/drawing/2014/main" id="{F44A043F-DDF6-404C-82FE-0986C7EE3763}"/>
+                <a16:creationId xmlns:a16="http://schemas.microsoft.com/office/drawing/2014/main" id="{823BCC66-52A2-4BCB-8E74-51D28550E2A3}"/>
               </a:ext>
             </a:extLst>
           </p:cNvPr>
@@ -10640,7 +10648,7 @@
           <p:cNvPr id="13" name="">
             <a:extLst xmlns:a="http://schemas.openxmlformats.org/drawingml/2006/main">
               <a:ext uri="{FF2B5EF4-FFF2-40B4-BE49-F238E27FC236}">
-                <a16:creationId xmlns:a16="http://schemas.microsoft.com/office/drawing/2014/main" id="{87AAA036-E70D-4E56-8D8D-C094FEBDB315}"/>
+                <a16:creationId xmlns:a16="http://schemas.microsoft.com/office/drawing/2014/main" id="{5EB853A4-1FD2-4A4A-AF28-AFD962CBEFB9}"/>
               </a:ext>
             </a:extLst>
           </p:cNvPr>
@@ -10697,7 +10705,7 @@
           <p:cNvPr id="14" name="">
             <a:extLst xmlns:a="http://schemas.openxmlformats.org/drawingml/2006/main">
               <a:ext uri="{FF2B5EF4-FFF2-40B4-BE49-F238E27FC236}">
-                <a16:creationId xmlns:a16="http://schemas.microsoft.com/office/drawing/2014/main" id="{B3FD1A09-0A4C-4740-BA8D-A78FA61A5CB7}"/>
+                <a16:creationId xmlns:a16="http://schemas.microsoft.com/office/drawing/2014/main" id="{EAD3E709-4E2F-4A81-B329-EEDA6BF71AB8}"/>
               </a:ext>
             </a:extLst>
           </p:cNvPr>
@@ -10754,7 +10762,7 @@
           <p:cNvPr id="15" name="">
             <a:extLst xmlns:a="http://schemas.openxmlformats.org/drawingml/2006/main">
               <a:ext uri="{FF2B5EF4-FFF2-40B4-BE49-F238E27FC236}">
-                <a16:creationId xmlns:a16="http://schemas.microsoft.com/office/drawing/2014/main" id="{63863CE6-5508-4CD3-8C38-743EA5E27AB2}"/>
+                <a16:creationId xmlns:a16="http://schemas.microsoft.com/office/drawing/2014/main" id="{ABC89EBC-F71C-4031-B943-CFEAA3DE1C3F}"/>
               </a:ext>
             </a:extLst>
           </p:cNvPr>
@@ -10809,7 +10817,7 @@
     </p:spTree>
     <p:extLst>
       <p:ext uri="{BB962C8B-B14F-4D97-AF65-F5344CB8AC3E}">
-        <p14:creationId xmlns:p14="http://schemas.microsoft.com/office/powerpoint/2010/main" val="1927977395"/>
+        <p14:creationId xmlns:p14="http://schemas.microsoft.com/office/powerpoint/2010/main" val="251086857"/>
       </p:ext>
     </p:extLst>
   </p:cSld>
@@ -10964,7 +10972,7 @@
           <p:cNvPr id="16" name="">
             <a:extLst xmlns:a="http://schemas.openxmlformats.org/drawingml/2006/main">
               <a:ext uri="{FF2B5EF4-FFF2-40B4-BE49-F238E27FC236}">
-                <a16:creationId xmlns:a16="http://schemas.microsoft.com/office/drawing/2014/main" id="{B1EB0FF2-C0F9-4290-B969-2C8E1C74BAA1}"/>
+                <a16:creationId xmlns:a16="http://schemas.microsoft.com/office/drawing/2014/main" id="{2E21DD09-D447-402D-B7DF-92CBD83C9205}"/>
               </a:ext>
             </a:extLst>
           </p:cNvPr>
@@ -10996,7 +11004,7 @@
           <p:cNvPr id="2" name="">
             <a:extLst xmlns:a="http://schemas.openxmlformats.org/drawingml/2006/main">
               <a:ext uri="{FF2B5EF4-FFF2-40B4-BE49-F238E27FC236}">
-                <a16:creationId xmlns:a16="http://schemas.microsoft.com/office/drawing/2014/main" id="{99454F01-68A1-4DF5-83E7-4308FD8DDFE2}"/>
+                <a16:creationId xmlns:a16="http://schemas.microsoft.com/office/drawing/2014/main" id="{F7504DEA-064C-450F-9B33-6C9F64D845B4}"/>
               </a:ext>
             </a:extLst>
           </p:cNvPr>
@@ -11053,7 +11061,7 @@
           <p:cNvPr id="3" name="">
             <a:extLst xmlns:a="http://schemas.openxmlformats.org/drawingml/2006/main">
               <a:ext uri="{FF2B5EF4-FFF2-40B4-BE49-F238E27FC236}">
-                <a16:creationId xmlns:a16="http://schemas.microsoft.com/office/drawing/2014/main" id="{8A0ACB0C-C749-4AB6-88C1-3D6B54AF8BB3}"/>
+                <a16:creationId xmlns:a16="http://schemas.microsoft.com/office/drawing/2014/main" id="{E388B4FF-3E6D-4D19-B50D-729F3AA86756}"/>
               </a:ext>
             </a:extLst>
           </p:cNvPr>
@@ -11085,7 +11093,7 @@
           <p:cNvPr id="4" name="">
             <a:extLst xmlns:a="http://schemas.openxmlformats.org/drawingml/2006/main">
               <a:ext uri="{FF2B5EF4-FFF2-40B4-BE49-F238E27FC236}">
-                <a16:creationId xmlns:a16="http://schemas.microsoft.com/office/drawing/2014/main" id="{DB65404C-340A-4227-B729-A66062B20330}"/>
+                <a16:creationId xmlns:a16="http://schemas.microsoft.com/office/drawing/2014/main" id="{A56CA66E-D0CF-4DBF-8ADF-562D042C7E79}"/>
               </a:ext>
             </a:extLst>
           </p:cNvPr>
@@ -11142,7 +11150,7 @@
           <p:cNvPr id="5" name="">
             <a:extLst xmlns:a="http://schemas.openxmlformats.org/drawingml/2006/main">
               <a:ext uri="{FF2B5EF4-FFF2-40B4-BE49-F238E27FC236}">
-                <a16:creationId xmlns:a16="http://schemas.microsoft.com/office/drawing/2014/main" id="{591BF89D-5A1E-4658-B1C9-ABEE8F3412E1}"/>
+                <a16:creationId xmlns:a16="http://schemas.microsoft.com/office/drawing/2014/main" id="{1C51B311-97CC-4D34-BB91-B250C322D43B}"/>
               </a:ext>
             </a:extLst>
           </p:cNvPr>
@@ -11199,7 +11207,7 @@
           <p:cNvPr id="6" name="">
             <a:extLst xmlns:a="http://schemas.openxmlformats.org/drawingml/2006/main">
               <a:ext uri="{FF2B5EF4-FFF2-40B4-BE49-F238E27FC236}">
-                <a16:creationId xmlns:a16="http://schemas.microsoft.com/office/drawing/2014/main" id="{99901F62-940B-4E3E-9A3C-75E212367E4D}"/>
+                <a16:creationId xmlns:a16="http://schemas.microsoft.com/office/drawing/2014/main" id="{5EA30D11-54A1-455F-9924-E94C3C8BF01E}"/>
               </a:ext>
             </a:extLst>
           </p:cNvPr>
@@ -11256,7 +11264,7 @@
           <p:cNvPr id="7" name="">
             <a:extLst xmlns:a="http://schemas.openxmlformats.org/drawingml/2006/main">
               <a:ext uri="{FF2B5EF4-FFF2-40B4-BE49-F238E27FC236}">
-                <a16:creationId xmlns:a16="http://schemas.microsoft.com/office/drawing/2014/main" id="{E0F7BF61-D46C-4BC9-ABEE-04C5E99A569A}"/>
+                <a16:creationId xmlns:a16="http://schemas.microsoft.com/office/drawing/2014/main" id="{F56C44DF-4C6F-41B1-ACE4-EFF2DD06F99F}"/>
               </a:ext>
             </a:extLst>
           </p:cNvPr>
@@ -11288,7 +11296,7 @@
           <p:cNvPr id="8" name="">
             <a:extLst xmlns:a="http://schemas.openxmlformats.org/drawingml/2006/main">
               <a:ext uri="{FF2B5EF4-FFF2-40B4-BE49-F238E27FC236}">
-                <a16:creationId xmlns:a16="http://schemas.microsoft.com/office/drawing/2014/main" id="{59DAAEAD-EB97-46D4-BF7D-623402976D71}"/>
+                <a16:creationId xmlns:a16="http://schemas.microsoft.com/office/drawing/2014/main" id="{E6D67CF8-03EC-4717-854B-43A58B91A361}"/>
               </a:ext>
             </a:extLst>
           </p:cNvPr>
@@ -11345,7 +11353,7 @@
           <p:cNvPr id="9" name="">
             <a:extLst xmlns:a="http://schemas.openxmlformats.org/drawingml/2006/main">
               <a:ext uri="{FF2B5EF4-FFF2-40B4-BE49-F238E27FC236}">
-                <a16:creationId xmlns:a16="http://schemas.microsoft.com/office/drawing/2014/main" id="{0B9A4D3F-2B83-4E67-AB97-1D880AFB5FC9}"/>
+                <a16:creationId xmlns:a16="http://schemas.microsoft.com/office/drawing/2014/main" id="{0453F2C2-FB13-460F-840A-FDEE18BDF21F}"/>
               </a:ext>
             </a:extLst>
           </p:cNvPr>
@@ -11406,7 +11414,7 @@
           <p:nvPr/>
         </p:nvPicPr>
         <p:blipFill>
-          <a:blip xmlns:r="http://schemas.openxmlformats.org/officeDocument/2006/relationships" xmlns:a="http://schemas.openxmlformats.org/drawingml/2006/main" r:embed="R39a1ce4d0b3848b3"/>
+          <a:blip xmlns:r="http://schemas.openxmlformats.org/officeDocument/2006/relationships" xmlns:a="http://schemas.openxmlformats.org/drawingml/2006/main" r:embed="Rdaffb111c3664662"/>
           <a:stretch xmlns:a="http://schemas.openxmlformats.org/drawingml/2006/main"/>
         </p:blipFill>
         <p:spPr>
@@ -11424,7 +11432,7 @@
           <p:cNvPr id="11" name="">
             <a:extLst xmlns:a="http://schemas.openxmlformats.org/drawingml/2006/main">
               <a:ext uri="{FF2B5EF4-FFF2-40B4-BE49-F238E27FC236}">
-                <a16:creationId xmlns:a16="http://schemas.microsoft.com/office/drawing/2014/main" id="{66295836-496D-4468-89DA-4451092B3332}"/>
+                <a16:creationId xmlns:a16="http://schemas.microsoft.com/office/drawing/2014/main" id="{A1C63C57-86C1-496A-BDB9-8CC8ED9CF1D0}"/>
               </a:ext>
             </a:extLst>
           </p:cNvPr>
@@ -11481,7 +11489,7 @@
           <p:cNvPr id="12" name="">
             <a:extLst xmlns:a="http://schemas.openxmlformats.org/drawingml/2006/main">
               <a:ext uri="{FF2B5EF4-FFF2-40B4-BE49-F238E27FC236}">
-                <a16:creationId xmlns:a16="http://schemas.microsoft.com/office/drawing/2014/main" id="{E201A6E4-6151-442D-8109-BE29A7D211B5}"/>
+                <a16:creationId xmlns:a16="http://schemas.microsoft.com/office/drawing/2014/main" id="{AF8DFFD4-91DE-48BD-A739-A8211ED73DF7}"/>
               </a:ext>
             </a:extLst>
           </p:cNvPr>
@@ -11538,7 +11546,7 @@
           <p:cNvPr id="13" name="">
             <a:extLst xmlns:a="http://schemas.openxmlformats.org/drawingml/2006/main">
               <a:ext uri="{FF2B5EF4-FFF2-40B4-BE49-F238E27FC236}">
-                <a16:creationId xmlns:a16="http://schemas.microsoft.com/office/drawing/2014/main" id="{DBF75DA0-8B0E-4285-9250-2643CF080E03}"/>
+                <a16:creationId xmlns:a16="http://schemas.microsoft.com/office/drawing/2014/main" id="{2B74B9C1-7011-4C58-A76B-2EE7142707B6}"/>
               </a:ext>
             </a:extLst>
           </p:cNvPr>
@@ -11570,7 +11578,7 @@
           <p:cNvPr id="14" name="">
             <a:extLst xmlns:a="http://schemas.openxmlformats.org/drawingml/2006/main">
               <a:ext uri="{FF2B5EF4-FFF2-40B4-BE49-F238E27FC236}">
-                <a16:creationId xmlns:a16="http://schemas.microsoft.com/office/drawing/2014/main" id="{E40309D2-56F7-41A7-AD99-DC713C873ACF}"/>
+                <a16:creationId xmlns:a16="http://schemas.microsoft.com/office/drawing/2014/main" id="{C5FC49DB-7203-4DC0-9F96-CECFEE817D25}"/>
               </a:ext>
             </a:extLst>
           </p:cNvPr>
@@ -11627,7 +11635,7 @@
           <p:cNvPr id="15" name="">
             <a:extLst xmlns:a="http://schemas.openxmlformats.org/drawingml/2006/main">
               <a:ext uri="{FF2B5EF4-FFF2-40B4-BE49-F238E27FC236}">
-                <a16:creationId xmlns:a16="http://schemas.microsoft.com/office/drawing/2014/main" id="{2188950F-115C-40C6-B116-19DCD06BBF4C}"/>
+                <a16:creationId xmlns:a16="http://schemas.microsoft.com/office/drawing/2014/main" id="{6F61E751-0B12-4393-A870-FC107434B918}"/>
               </a:ext>
             </a:extLst>
           </p:cNvPr>
@@ -11682,7 +11690,7 @@
     </p:spTree>
     <p:extLst>
       <p:ext uri="{BB962C8B-B14F-4D97-AF65-F5344CB8AC3E}">
-        <p14:creationId xmlns:p14="http://schemas.microsoft.com/office/powerpoint/2010/main" val="80160979"/>
+        <p14:creationId xmlns:p14="http://schemas.microsoft.com/office/powerpoint/2010/main" val="720990640"/>
       </p:ext>
     </p:extLst>
   </p:cSld>
@@ -11837,7 +11845,7 @@
           <p:cNvPr id="23" name="">
             <a:extLst xmlns:a="http://schemas.openxmlformats.org/drawingml/2006/main">
               <a:ext uri="{FF2B5EF4-FFF2-40B4-BE49-F238E27FC236}">
-                <a16:creationId xmlns:a16="http://schemas.microsoft.com/office/drawing/2014/main" id="{01D6EDF9-D611-44CA-BDAC-42B6F1F6ECFE}"/>
+                <a16:creationId xmlns:a16="http://schemas.microsoft.com/office/drawing/2014/main" id="{9B577A7B-235D-406C-B533-224146113047}"/>
               </a:ext>
             </a:extLst>
           </p:cNvPr>
@@ -11869,7 +11877,7 @@
           <p:cNvPr id="2" name="">
             <a:extLst xmlns:a="http://schemas.openxmlformats.org/drawingml/2006/main">
               <a:ext uri="{FF2B5EF4-FFF2-40B4-BE49-F238E27FC236}">
-                <a16:creationId xmlns:a16="http://schemas.microsoft.com/office/drawing/2014/main" id="{761D0096-CAD5-4BF2-9F5F-61979368B58B}"/>
+                <a16:creationId xmlns:a16="http://schemas.microsoft.com/office/drawing/2014/main" id="{E90F20A2-0BB6-4D50-B8A4-CFA6256788ED}"/>
               </a:ext>
             </a:extLst>
           </p:cNvPr>
@@ -11926,7 +11934,7 @@
           <p:cNvPr id="3" name="">
             <a:extLst xmlns:a="http://schemas.openxmlformats.org/drawingml/2006/main">
               <a:ext uri="{FF2B5EF4-FFF2-40B4-BE49-F238E27FC236}">
-                <a16:creationId xmlns:a16="http://schemas.microsoft.com/office/drawing/2014/main" id="{7A4A5152-4468-45F6-9B05-BDCB62F5E37E}"/>
+                <a16:creationId xmlns:a16="http://schemas.microsoft.com/office/drawing/2014/main" id="{DDC0B66B-0EB4-4ADA-B97E-2C31EF6905D2}"/>
               </a:ext>
             </a:extLst>
           </p:cNvPr>
@@ -11958,7 +11966,7 @@
           <p:cNvPr id="4" name="">
             <a:extLst xmlns:a="http://schemas.openxmlformats.org/drawingml/2006/main">
               <a:ext uri="{FF2B5EF4-FFF2-40B4-BE49-F238E27FC236}">
-                <a16:creationId xmlns:a16="http://schemas.microsoft.com/office/drawing/2014/main" id="{C915A9B8-11C1-4B3C-AAD5-12E2FBAA1850}"/>
+                <a16:creationId xmlns:a16="http://schemas.microsoft.com/office/drawing/2014/main" id="{2B8E8A75-94E6-4ECD-A767-B601865602CC}"/>
               </a:ext>
             </a:extLst>
           </p:cNvPr>
@@ -12015,7 +12023,7 @@
           <p:cNvPr id="5" name="">
             <a:extLst xmlns:a="http://schemas.openxmlformats.org/drawingml/2006/main">
               <a:ext uri="{FF2B5EF4-FFF2-40B4-BE49-F238E27FC236}">
-                <a16:creationId xmlns:a16="http://schemas.microsoft.com/office/drawing/2014/main" id="{6D950556-AF36-4AB5-8B68-581F786519B6}"/>
+                <a16:creationId xmlns:a16="http://schemas.microsoft.com/office/drawing/2014/main" id="{BC9D302C-DB64-4070-BEF5-B724BB95AF18}"/>
               </a:ext>
             </a:extLst>
           </p:cNvPr>
@@ -12072,7 +12080,7 @@
           <p:cNvPr id="6" name="">
             <a:extLst xmlns:a="http://schemas.openxmlformats.org/drawingml/2006/main">
               <a:ext uri="{FF2B5EF4-FFF2-40B4-BE49-F238E27FC236}">
-                <a16:creationId xmlns:a16="http://schemas.microsoft.com/office/drawing/2014/main" id="{5A607B1D-7B24-46B3-9F2F-A90DFCEFC291}"/>
+                <a16:creationId xmlns:a16="http://schemas.microsoft.com/office/drawing/2014/main" id="{ACBC026C-7AD3-42E8-906B-FD8F724EEC8E}"/>
               </a:ext>
             </a:extLst>
           </p:cNvPr>
@@ -12129,7 +12137,7 @@
           <p:cNvPr id="7" name="">
             <a:extLst xmlns:a="http://schemas.openxmlformats.org/drawingml/2006/main">
               <a:ext uri="{FF2B5EF4-FFF2-40B4-BE49-F238E27FC236}">
-                <a16:creationId xmlns:a16="http://schemas.microsoft.com/office/drawing/2014/main" id="{D6DE0942-967D-4D13-82F4-968565C8CC26}"/>
+                <a16:creationId xmlns:a16="http://schemas.microsoft.com/office/drawing/2014/main" id="{AAD99CE1-5947-4363-994C-C57F03F30B1A}"/>
               </a:ext>
             </a:extLst>
           </p:cNvPr>
@@ -12161,7 +12169,7 @@
           <p:cNvPr id="8" name="">
             <a:extLst xmlns:a="http://schemas.openxmlformats.org/drawingml/2006/main">
               <a:ext uri="{FF2B5EF4-FFF2-40B4-BE49-F238E27FC236}">
-                <a16:creationId xmlns:a16="http://schemas.microsoft.com/office/drawing/2014/main" id="{B0FCC1D9-8096-4352-9373-7BDC8344B109}"/>
+                <a16:creationId xmlns:a16="http://schemas.microsoft.com/office/drawing/2014/main" id="{B2E2FCDB-058A-49F4-A1ED-2DFA194EA383}"/>
               </a:ext>
             </a:extLst>
           </p:cNvPr>
@@ -12218,7 +12226,7 @@
           <p:cNvPr id="9" name="">
             <a:extLst xmlns:a="http://schemas.openxmlformats.org/drawingml/2006/main">
               <a:ext uri="{FF2B5EF4-FFF2-40B4-BE49-F238E27FC236}">
-                <a16:creationId xmlns:a16="http://schemas.microsoft.com/office/drawing/2014/main" id="{AECEC467-C671-4492-987E-9956484F3282}"/>
+                <a16:creationId xmlns:a16="http://schemas.microsoft.com/office/drawing/2014/main" id="{23FF361A-47A8-470F-A73E-89E8292B1A2D}"/>
               </a:ext>
             </a:extLst>
           </p:cNvPr>
@@ -12275,7 +12283,7 @@
           <p:cNvPr id="10" name="">
             <a:extLst xmlns:a="http://schemas.openxmlformats.org/drawingml/2006/main">
               <a:ext uri="{FF2B5EF4-FFF2-40B4-BE49-F238E27FC236}">
-                <a16:creationId xmlns:a16="http://schemas.microsoft.com/office/drawing/2014/main" id="{D9922AFB-D407-4164-B306-3C56427DBAA9}"/>
+                <a16:creationId xmlns:a16="http://schemas.microsoft.com/office/drawing/2014/main" id="{4239091E-BDA2-4303-8641-76FE5F07FC59}"/>
               </a:ext>
             </a:extLst>
           </p:cNvPr>
@@ -12309,7 +12317,7 @@
           <p:cNvPr id="11" name="">
             <a:extLst xmlns:a="http://schemas.openxmlformats.org/drawingml/2006/main">
               <a:ext uri="{FF2B5EF4-FFF2-40B4-BE49-F238E27FC236}">
-                <a16:creationId xmlns:a16="http://schemas.microsoft.com/office/drawing/2014/main" id="{83711C63-C29D-4BC1-B837-C31923218385}"/>
+                <a16:creationId xmlns:a16="http://schemas.microsoft.com/office/drawing/2014/main" id="{967D70E8-7B96-4969-AD5A-2B4A551BB05A}"/>
               </a:ext>
             </a:extLst>
           </p:cNvPr>
@@ -12341,7 +12349,7 @@
           <p:cNvPr id="12" name="">
             <a:extLst xmlns:a="http://schemas.openxmlformats.org/drawingml/2006/main">
               <a:ext uri="{FF2B5EF4-FFF2-40B4-BE49-F238E27FC236}">
-                <a16:creationId xmlns:a16="http://schemas.microsoft.com/office/drawing/2014/main" id="{BD436A8A-772F-4E76-A4F3-A20745CD86B8}"/>
+                <a16:creationId xmlns:a16="http://schemas.microsoft.com/office/drawing/2014/main" id="{575F146E-784D-4A1F-945C-D754C6D138AD}"/>
               </a:ext>
             </a:extLst>
           </p:cNvPr>
@@ -12398,7 +12406,7 @@
           <p:cNvPr id="13" name="">
             <a:extLst xmlns:a="http://schemas.openxmlformats.org/drawingml/2006/main">
               <a:ext uri="{FF2B5EF4-FFF2-40B4-BE49-F238E27FC236}">
-                <a16:creationId xmlns:a16="http://schemas.microsoft.com/office/drawing/2014/main" id="{D16377CE-1AE5-435F-A0E5-B3EA28A8D25E}"/>
+                <a16:creationId xmlns:a16="http://schemas.microsoft.com/office/drawing/2014/main" id="{B289CCB7-B7D3-4B01-9176-3AF91F791CD4}"/>
               </a:ext>
             </a:extLst>
           </p:cNvPr>
@@ -12455,7 +12463,7 @@
           <p:cNvPr id="14" name="">
             <a:extLst xmlns:a="http://schemas.openxmlformats.org/drawingml/2006/main">
               <a:ext uri="{FF2B5EF4-FFF2-40B4-BE49-F238E27FC236}">
-                <a16:creationId xmlns:a16="http://schemas.microsoft.com/office/drawing/2014/main" id="{6FC820E1-9B7F-4729-B9FD-B4AF9DC2B2B6}"/>
+                <a16:creationId xmlns:a16="http://schemas.microsoft.com/office/drawing/2014/main" id="{10874538-5F51-462C-8B60-5421C93B77CB}"/>
               </a:ext>
             </a:extLst>
           </p:cNvPr>
@@ -12489,7 +12497,7 @@
           <p:cNvPr id="15" name="">
             <a:extLst xmlns:a="http://schemas.openxmlformats.org/drawingml/2006/main">
               <a:ext uri="{FF2B5EF4-FFF2-40B4-BE49-F238E27FC236}">
-                <a16:creationId xmlns:a16="http://schemas.microsoft.com/office/drawing/2014/main" id="{E88EE81A-D0E0-4E3D-9B59-0E0B8125CE92}"/>
+                <a16:creationId xmlns:a16="http://schemas.microsoft.com/office/drawing/2014/main" id="{463123C1-503E-4F33-AFDB-E41493EABAB0}"/>
               </a:ext>
             </a:extLst>
           </p:cNvPr>
@@ -12521,7 +12529,7 @@
           <p:cNvPr id="16" name="">
             <a:extLst xmlns:a="http://schemas.openxmlformats.org/drawingml/2006/main">
               <a:ext uri="{FF2B5EF4-FFF2-40B4-BE49-F238E27FC236}">
-                <a16:creationId xmlns:a16="http://schemas.microsoft.com/office/drawing/2014/main" id="{7DE38D56-8E67-4F4C-903C-146BF75A47CF}"/>
+                <a16:creationId xmlns:a16="http://schemas.microsoft.com/office/drawing/2014/main" id="{2B420D97-36F7-4EC5-AC79-F3E59B141967}"/>
               </a:ext>
             </a:extLst>
           </p:cNvPr>
@@ -12578,7 +12586,7 @@
           <p:cNvPr id="17" name="">
             <a:extLst xmlns:a="http://schemas.openxmlformats.org/drawingml/2006/main">
               <a:ext uri="{FF2B5EF4-FFF2-40B4-BE49-F238E27FC236}">
-                <a16:creationId xmlns:a16="http://schemas.microsoft.com/office/drawing/2014/main" id="{49C70E77-6D16-4F5C-B828-20AD1ABE62AB}"/>
+                <a16:creationId xmlns:a16="http://schemas.microsoft.com/office/drawing/2014/main" id="{FF28E3F2-4462-4D72-93B5-9FD2D5C9196F}"/>
               </a:ext>
             </a:extLst>
           </p:cNvPr>
@@ -12635,7 +12643,7 @@
           <p:cNvPr id="18" name="">
             <a:extLst xmlns:a="http://schemas.openxmlformats.org/drawingml/2006/main">
               <a:ext uri="{FF2B5EF4-FFF2-40B4-BE49-F238E27FC236}">
-                <a16:creationId xmlns:a16="http://schemas.microsoft.com/office/drawing/2014/main" id="{9E2EFE9C-B5B1-4CDF-B1BB-0B3AE0222D01}"/>
+                <a16:creationId xmlns:a16="http://schemas.microsoft.com/office/drawing/2014/main" id="{008B9DAC-B1B2-41D9-8735-C46A2F904741}"/>
               </a:ext>
             </a:extLst>
           </p:cNvPr>
@@ -12669,7 +12677,7 @@
           <p:cNvPr id="19" name="">
             <a:extLst xmlns:a="http://schemas.openxmlformats.org/drawingml/2006/main">
               <a:ext uri="{FF2B5EF4-FFF2-40B4-BE49-F238E27FC236}">
-                <a16:creationId xmlns:a16="http://schemas.microsoft.com/office/drawing/2014/main" id="{26FF0396-B3BF-4682-8A2D-086C442FD14B}"/>
+                <a16:creationId xmlns:a16="http://schemas.microsoft.com/office/drawing/2014/main" id="{53657F7D-1D47-4A7A-BC65-2A0F01E691EC}"/>
               </a:ext>
             </a:extLst>
           </p:cNvPr>
@@ -12701,7 +12709,7 @@
           <p:cNvPr id="20" name="">
             <a:extLst xmlns:a="http://schemas.openxmlformats.org/drawingml/2006/main">
               <a:ext uri="{FF2B5EF4-FFF2-40B4-BE49-F238E27FC236}">
-                <a16:creationId xmlns:a16="http://schemas.microsoft.com/office/drawing/2014/main" id="{E4E2BCF1-C602-4F46-8E87-2FE1C65B9446}"/>
+                <a16:creationId xmlns:a16="http://schemas.microsoft.com/office/drawing/2014/main" id="{B682967E-2C06-4F40-83A0-30AFCE574B6D}"/>
               </a:ext>
             </a:extLst>
           </p:cNvPr>
@@ -12758,7 +12766,7 @@
           <p:cNvPr id="21" name="">
             <a:extLst xmlns:a="http://schemas.openxmlformats.org/drawingml/2006/main">
               <a:ext uri="{FF2B5EF4-FFF2-40B4-BE49-F238E27FC236}">
-                <a16:creationId xmlns:a16="http://schemas.microsoft.com/office/drawing/2014/main" id="{D7F8E07B-DF20-4418-9080-583F02B8B686}"/>
+                <a16:creationId xmlns:a16="http://schemas.microsoft.com/office/drawing/2014/main" id="{0C543472-DB10-4543-8D41-EE1460EE90EF}"/>
               </a:ext>
             </a:extLst>
           </p:cNvPr>
@@ -12815,7 +12823,7 @@
           <p:cNvPr id="22" name="">
             <a:extLst xmlns:a="http://schemas.openxmlformats.org/drawingml/2006/main">
               <a:ext uri="{FF2B5EF4-FFF2-40B4-BE49-F238E27FC236}">
-                <a16:creationId xmlns:a16="http://schemas.microsoft.com/office/drawing/2014/main" id="{294A4510-5D0D-418C-8FC4-74CD7D5B4BE1}"/>
+                <a16:creationId xmlns:a16="http://schemas.microsoft.com/office/drawing/2014/main" id="{0D25FFF9-FAA2-4068-A005-6608778C7900}"/>
               </a:ext>
             </a:extLst>
           </p:cNvPr>
@@ -12870,7 +12878,7 @@
     </p:spTree>
     <p:extLst>
       <p:ext uri="{BB962C8B-B14F-4D97-AF65-F5344CB8AC3E}">
-        <p14:creationId xmlns:p14="http://schemas.microsoft.com/office/powerpoint/2010/main" val="919467137"/>
+        <p14:creationId xmlns:p14="http://schemas.microsoft.com/office/powerpoint/2010/main" val="1820361616"/>
       </p:ext>
     </p:extLst>
   </p:cSld>
@@ -13071,7 +13079,7 @@
           <p:cNvPr id="22" name="">
             <a:extLst xmlns:a="http://schemas.openxmlformats.org/drawingml/2006/main">
               <a:ext uri="{FF2B5EF4-FFF2-40B4-BE49-F238E27FC236}">
-                <a16:creationId xmlns:a16="http://schemas.microsoft.com/office/drawing/2014/main" id="{5FC851AC-343D-48D7-8ABF-B93977A55BE7}"/>
+                <a16:creationId xmlns:a16="http://schemas.microsoft.com/office/drawing/2014/main" id="{599ED321-A587-4B28-951C-354493C1179F}"/>
               </a:ext>
             </a:extLst>
           </p:cNvPr>
@@ -13103,7 +13111,7 @@
           <p:cNvPr id="2" name="">
             <a:extLst xmlns:a="http://schemas.openxmlformats.org/drawingml/2006/main">
               <a:ext uri="{FF2B5EF4-FFF2-40B4-BE49-F238E27FC236}">
-                <a16:creationId xmlns:a16="http://schemas.microsoft.com/office/drawing/2014/main" id="{1538DA9D-24B8-425E-80D5-B1C64E7886C8}"/>
+                <a16:creationId xmlns:a16="http://schemas.microsoft.com/office/drawing/2014/main" id="{84D61399-2B2B-4867-9D14-5F120D4D68EA}"/>
               </a:ext>
             </a:extLst>
           </p:cNvPr>
@@ -13160,7 +13168,7 @@
           <p:cNvPr id="3" name="">
             <a:extLst xmlns:a="http://schemas.openxmlformats.org/drawingml/2006/main">
               <a:ext uri="{FF2B5EF4-FFF2-40B4-BE49-F238E27FC236}">
-                <a16:creationId xmlns:a16="http://schemas.microsoft.com/office/drawing/2014/main" id="{21DCF154-8356-4B3A-B218-7189B6DABB63}"/>
+                <a16:creationId xmlns:a16="http://schemas.microsoft.com/office/drawing/2014/main" id="{FF95FA07-272F-40CC-B1EC-17BBC08E41B0}"/>
               </a:ext>
             </a:extLst>
           </p:cNvPr>
@@ -13192,7 +13200,7 @@
           <p:cNvPr id="4" name="">
             <a:extLst xmlns:a="http://schemas.openxmlformats.org/drawingml/2006/main">
               <a:ext uri="{FF2B5EF4-FFF2-40B4-BE49-F238E27FC236}">
-                <a16:creationId xmlns:a16="http://schemas.microsoft.com/office/drawing/2014/main" id="{54B41408-CF83-4762-B217-6390D4ED65F8}"/>
+                <a16:creationId xmlns:a16="http://schemas.microsoft.com/office/drawing/2014/main" id="{DA93146B-6B83-4BA8-B708-3342AC6F84F2}"/>
               </a:ext>
             </a:extLst>
           </p:cNvPr>
@@ -13249,7 +13257,7 @@
           <p:cNvPr id="5" name="">
             <a:extLst xmlns:a="http://schemas.openxmlformats.org/drawingml/2006/main">
               <a:ext uri="{FF2B5EF4-FFF2-40B4-BE49-F238E27FC236}">
-                <a16:creationId xmlns:a16="http://schemas.microsoft.com/office/drawing/2014/main" id="{7B6D240B-1D1F-4E70-8B18-9292C47AA3B5}"/>
+                <a16:creationId xmlns:a16="http://schemas.microsoft.com/office/drawing/2014/main" id="{E41473F6-DDE3-4B2C-8045-E7550E7E12F0}"/>
               </a:ext>
             </a:extLst>
           </p:cNvPr>
@@ -13306,7 +13314,7 @@
           <p:cNvPr id="6" name="">
             <a:extLst xmlns:a="http://schemas.openxmlformats.org/drawingml/2006/main">
               <a:ext uri="{FF2B5EF4-FFF2-40B4-BE49-F238E27FC236}">
-                <a16:creationId xmlns:a16="http://schemas.microsoft.com/office/drawing/2014/main" id="{BE6D3728-0618-4055-8591-5DD33EF76D62}"/>
+                <a16:creationId xmlns:a16="http://schemas.microsoft.com/office/drawing/2014/main" id="{D91D8BA5-EE34-455F-8D69-63EEF54161FC}"/>
               </a:ext>
             </a:extLst>
           </p:cNvPr>
@@ -13363,7 +13371,7 @@
           <p:cNvPr id="7" name="">
             <a:extLst xmlns:a="http://schemas.openxmlformats.org/drawingml/2006/main">
               <a:ext uri="{FF2B5EF4-FFF2-40B4-BE49-F238E27FC236}">
-                <a16:creationId xmlns:a16="http://schemas.microsoft.com/office/drawing/2014/main" id="{2D875A52-71CC-49B3-94FE-BEB6E933D2F3}"/>
+                <a16:creationId xmlns:a16="http://schemas.microsoft.com/office/drawing/2014/main" id="{6ECE8735-6DAC-40E5-9586-4D9B01F9C1C5}"/>
               </a:ext>
             </a:extLst>
           </p:cNvPr>
@@ -13395,7 +13403,7 @@
           <p:cNvPr id="8" name="">
             <a:extLst xmlns:a="http://schemas.openxmlformats.org/drawingml/2006/main">
               <a:ext uri="{FF2B5EF4-FFF2-40B4-BE49-F238E27FC236}">
-                <a16:creationId xmlns:a16="http://schemas.microsoft.com/office/drawing/2014/main" id="{DF03B9E7-318A-44D5-BDD3-8DA2A91D5913}"/>
+                <a16:creationId xmlns:a16="http://schemas.microsoft.com/office/drawing/2014/main" id="{0271B454-DBB7-4D8B-9A5C-DA25C65790D5}"/>
               </a:ext>
             </a:extLst>
           </p:cNvPr>
@@ -13452,7 +13460,7 @@
           <p:cNvPr id="9" name="">
             <a:extLst xmlns:a="http://schemas.openxmlformats.org/drawingml/2006/main">
               <a:ext uri="{FF2B5EF4-FFF2-40B4-BE49-F238E27FC236}">
-                <a16:creationId xmlns:a16="http://schemas.microsoft.com/office/drawing/2014/main" id="{80B4192F-3FDF-4DE5-B500-C296366AACF7}"/>
+                <a16:creationId xmlns:a16="http://schemas.microsoft.com/office/drawing/2014/main" id="{C755185D-F572-4118-BA80-6D6E2A8943F7}"/>
               </a:ext>
             </a:extLst>
           </p:cNvPr>
@@ -13509,7 +13517,7 @@
           <p:cNvPr id="10" name="">
             <a:extLst xmlns:a="http://schemas.openxmlformats.org/drawingml/2006/main">
               <a:ext uri="{FF2B5EF4-FFF2-40B4-BE49-F238E27FC236}">
-                <a16:creationId xmlns:a16="http://schemas.microsoft.com/office/drawing/2014/main" id="{E3367718-BCD5-40C8-8992-B8F094A05340}"/>
+                <a16:creationId xmlns:a16="http://schemas.microsoft.com/office/drawing/2014/main" id="{0E0278C1-1E92-4AFC-AC89-6BB458A0A4D3}"/>
               </a:ext>
             </a:extLst>
           </p:cNvPr>
@@ -13543,7 +13551,7 @@
           <p:cNvPr id="11" name="">
             <a:extLst xmlns:a="http://schemas.openxmlformats.org/drawingml/2006/main">
               <a:ext uri="{FF2B5EF4-FFF2-40B4-BE49-F238E27FC236}">
-                <a16:creationId xmlns:a16="http://schemas.microsoft.com/office/drawing/2014/main" id="{3AF3BBCC-381F-434A-B5D3-240EB58A4206}"/>
+                <a16:creationId xmlns:a16="http://schemas.microsoft.com/office/drawing/2014/main" id="{99A2BAD2-1D76-4835-9C84-C96473AE5262}"/>
               </a:ext>
             </a:extLst>
           </p:cNvPr>
@@ -13575,7 +13583,7 @@
           <p:cNvPr id="12" name="">
             <a:extLst xmlns:a="http://schemas.openxmlformats.org/drawingml/2006/main">
               <a:ext uri="{FF2B5EF4-FFF2-40B4-BE49-F238E27FC236}">
-                <a16:creationId xmlns:a16="http://schemas.microsoft.com/office/drawing/2014/main" id="{DDFA9C02-0C68-4132-A95A-7E8CD1F2FC34}"/>
+                <a16:creationId xmlns:a16="http://schemas.microsoft.com/office/drawing/2014/main" id="{533EB29B-6E17-4021-B513-7BDBC9651814}"/>
               </a:ext>
             </a:extLst>
           </p:cNvPr>
@@ -13632,7 +13640,7 @@
           <p:cNvPr id="13" name="">
             <a:extLst xmlns:a="http://schemas.openxmlformats.org/drawingml/2006/main">
               <a:ext uri="{FF2B5EF4-FFF2-40B4-BE49-F238E27FC236}">
-                <a16:creationId xmlns:a16="http://schemas.microsoft.com/office/drawing/2014/main" id="{1C95D766-37D3-4591-9458-436B8EEE113B}"/>
+                <a16:creationId xmlns:a16="http://schemas.microsoft.com/office/drawing/2014/main" id="{2CE46A3F-CF9F-41ED-9180-0A173BAF65A1}"/>
               </a:ext>
             </a:extLst>
           </p:cNvPr>
@@ -13689,7 +13697,7 @@
           <p:cNvPr id="14" name="">
             <a:extLst xmlns:a="http://schemas.openxmlformats.org/drawingml/2006/main">
               <a:ext uri="{FF2B5EF4-FFF2-40B4-BE49-F238E27FC236}">
-                <a16:creationId xmlns:a16="http://schemas.microsoft.com/office/drawing/2014/main" id="{E97F3139-1CDC-47AE-AE91-EA2C0B3B568F}"/>
+                <a16:creationId xmlns:a16="http://schemas.microsoft.com/office/drawing/2014/main" id="{7402E112-E035-4482-B19A-DA143BD38345}"/>
               </a:ext>
             </a:extLst>
           </p:cNvPr>
@@ -13723,7 +13731,7 @@
           <p:cNvPr id="15" name="">
             <a:extLst xmlns:a="http://schemas.openxmlformats.org/drawingml/2006/main">
               <a:ext uri="{FF2B5EF4-FFF2-40B4-BE49-F238E27FC236}">
-                <a16:creationId xmlns:a16="http://schemas.microsoft.com/office/drawing/2014/main" id="{BA0B98BE-3745-4798-9E25-99591E574D50}"/>
+                <a16:creationId xmlns:a16="http://schemas.microsoft.com/office/drawing/2014/main" id="{C9471D01-99A9-409A-995B-52E43DD76851}"/>
               </a:ext>
             </a:extLst>
           </p:cNvPr>
@@ -13755,7 +13763,7 @@
           <p:cNvPr id="16" name="">
             <a:extLst xmlns:a="http://schemas.openxmlformats.org/drawingml/2006/main">
               <a:ext uri="{FF2B5EF4-FFF2-40B4-BE49-F238E27FC236}">
-                <a16:creationId xmlns:a16="http://schemas.microsoft.com/office/drawing/2014/main" id="{3EE3152E-9E7A-42A7-B4F5-167B29B27AD4}"/>
+                <a16:creationId xmlns:a16="http://schemas.microsoft.com/office/drawing/2014/main" id="{F73F68F2-1D81-42FA-A669-09C469DFD7A7}"/>
               </a:ext>
             </a:extLst>
           </p:cNvPr>
@@ -13812,7 +13820,7 @@
           <p:cNvPr id="17" name="">
             <a:extLst xmlns:a="http://schemas.openxmlformats.org/drawingml/2006/main">
               <a:ext uri="{FF2B5EF4-FFF2-40B4-BE49-F238E27FC236}">
-                <a16:creationId xmlns:a16="http://schemas.microsoft.com/office/drawing/2014/main" id="{3A19E343-29C8-49CB-BBC6-3B62CACF1BBA}"/>
+                <a16:creationId xmlns:a16="http://schemas.microsoft.com/office/drawing/2014/main" id="{A77D4410-22B0-4EF3-B850-5DD3FE5975A0}"/>
               </a:ext>
             </a:extLst>
           </p:cNvPr>
@@ -13869,7 +13877,7 @@
           <p:cNvPr id="18" name="">
             <a:extLst xmlns:a="http://schemas.openxmlformats.org/drawingml/2006/main">
               <a:ext uri="{FF2B5EF4-FFF2-40B4-BE49-F238E27FC236}">
-                <a16:creationId xmlns:a16="http://schemas.microsoft.com/office/drawing/2014/main" id="{FB47D5C8-E806-41B1-BA67-133C66238EC9}"/>
+                <a16:creationId xmlns:a16="http://schemas.microsoft.com/office/drawing/2014/main" id="{188A909F-661C-4CBA-94A1-280A5DB609B9}"/>
               </a:ext>
             </a:extLst>
           </p:cNvPr>
@@ -13903,7 +13911,7 @@
           <p:cNvPr id="19" name="">
             <a:extLst xmlns:a="http://schemas.openxmlformats.org/drawingml/2006/main">
               <a:ext uri="{FF2B5EF4-FFF2-40B4-BE49-F238E27FC236}">
-                <a16:creationId xmlns:a16="http://schemas.microsoft.com/office/drawing/2014/main" id="{0EB58309-F0F1-40A3-946E-969C3579AC3B}"/>
+                <a16:creationId xmlns:a16="http://schemas.microsoft.com/office/drawing/2014/main" id="{664A92C2-C290-4554-A811-5EF6876636EF}"/>
               </a:ext>
             </a:extLst>
           </p:cNvPr>
@@ -13935,7 +13943,7 @@
           <p:cNvPr id="20" name="">
             <a:extLst xmlns:a="http://schemas.openxmlformats.org/drawingml/2006/main">
               <a:ext uri="{FF2B5EF4-FFF2-40B4-BE49-F238E27FC236}">
-                <a16:creationId xmlns:a16="http://schemas.microsoft.com/office/drawing/2014/main" id="{96CBCF4A-DB76-40B5-B3C6-ABA82C1EDEFC}"/>
+                <a16:creationId xmlns:a16="http://schemas.microsoft.com/office/drawing/2014/main" id="{4F5C3BB1-B3B1-4AAC-916B-1761EC0299F6}"/>
               </a:ext>
             </a:extLst>
           </p:cNvPr>
@@ -13992,7 +14000,7 @@
           <p:cNvPr id="21" name="">
             <a:extLst xmlns:a="http://schemas.openxmlformats.org/drawingml/2006/main">
               <a:ext uri="{FF2B5EF4-FFF2-40B4-BE49-F238E27FC236}">
-                <a16:creationId xmlns:a16="http://schemas.microsoft.com/office/drawing/2014/main" id="{0CA53685-97DB-4659-9CC0-FDAACF26FC83}"/>
+                <a16:creationId xmlns:a16="http://schemas.microsoft.com/office/drawing/2014/main" id="{C1107440-DD3C-4C83-8AF9-7AD5B173A27B}"/>
               </a:ext>
             </a:extLst>
           </p:cNvPr>
@@ -14047,7 +14055,7 @@
     </p:spTree>
     <p:extLst>
       <p:ext uri="{BB962C8B-B14F-4D97-AF65-F5344CB8AC3E}">
-        <p14:creationId xmlns:p14="http://schemas.microsoft.com/office/powerpoint/2010/main" val="1520219600"/>
+        <p14:creationId xmlns:p14="http://schemas.microsoft.com/office/powerpoint/2010/main" val="591654346"/>
       </p:ext>
     </p:extLst>
   </p:cSld>
